--- a/outputs/C.C._marketing_communication.pptx
+++ b/outputs/C.C._marketing_communication.pptx
@@ -3103,61 +3103,6 @@
           <a:prstGeom prst="rect">
             <a:avLst/>
           </a:prstGeom>
-          <a:ln>
-            <a:noFill/>
-          </a:ln>
-          <a:effectLst/>
-          <a:gradFill flip="none" rotWithShape="1">
-            <a:gsLst>
-              <a:gs pos="0">
-                <a:srgbClr val="07227A"/>
-              </a:gs>
-              <a:gs pos="85000">
-                <a:srgbClr val="07227A"/>
-              </a:gs>
-              <a:gs pos="100000">
-                <a:srgbClr val="1FCBD9"/>
-              </a:gs>
-            </a:gsLst>
-            <a:lin ang="2700000" scaled="0"/>
-          </a:gradFill>
-        </p:spPr>
-        <p:style>
-          <a:lnRef idx="1">
-            <a:schemeClr val="accent1"/>
-          </a:lnRef>
-          <a:fillRef idx="3">
-            <a:schemeClr val="accent1"/>
-          </a:fillRef>
-          <a:effectRef idx="2">
-            <a:schemeClr val="accent1"/>
-          </a:effectRef>
-          <a:fontRef idx="minor">
-            <a:schemeClr val="lt1"/>
-          </a:fontRef>
-        </p:style>
-        <p:txBody>
-          <a:bodyPr rtlCol="0" anchor="ctr"/>
-          <a:lstStyle/>
-          <a:p>
-            <a:pPr algn="ctr"/>
-          </a:p>
-        </p:txBody>
-      </p:sp>
-      <p:sp>
-        <p:nvSpPr>
-          <p:cNvPr id="3" name="Rectangle 2"/>
-          <p:cNvSpPr/>
-          <p:nvPr/>
-        </p:nvSpPr>
-        <p:spPr>
-          <a:xfrm>
-            <a:off x="0" y="0"/>
-            <a:ext cx="4300000" cy="6858000"/>
-          </a:xfrm>
-          <a:prstGeom prst="rect">
-            <a:avLst/>
-          </a:prstGeom>
           <a:solidFill>
             <a:srgbClr val="061A5E"/>
           </a:solidFill>
@@ -3190,7 +3135,1075 @@
       </p:sp>
       <p:sp>
         <p:nvSpPr>
-          <p:cNvPr id="4" name="Rectangle 3"/>
+          <p:cNvPr id="3" name="Rectangle 2"/>
+          <p:cNvSpPr/>
+          <p:nvPr/>
+        </p:nvSpPr>
+        <p:spPr>
+          <a:xfrm>
+            <a:off x="4300000" y="0"/>
+            <a:ext cx="15000" cy="6858000"/>
+          </a:xfrm>
+          <a:prstGeom prst="rect">
+            <a:avLst/>
+          </a:prstGeom>
+          <a:solidFill>
+            <a:srgbClr val="3AEDE5"/>
+          </a:solidFill>
+          <a:ln>
+            <a:noFill/>
+          </a:ln>
+          <a:effectLst/>
+        </p:spPr>
+        <p:style>
+          <a:lnRef idx="1">
+            <a:schemeClr val="accent1"/>
+          </a:lnRef>
+          <a:fillRef idx="3">
+            <a:schemeClr val="accent1"/>
+          </a:fillRef>
+          <a:effectRef idx="2">
+            <a:schemeClr val="accent1"/>
+          </a:effectRef>
+          <a:fontRef idx="minor">
+            <a:schemeClr val="lt1"/>
+          </a:fontRef>
+        </p:style>
+        <p:txBody>
+          <a:bodyPr rtlCol="0" anchor="ctr"/>
+          <a:lstStyle/>
+          <a:p>
+            <a:pPr algn="ctr"/>
+          </a:p>
+        </p:txBody>
+      </p:sp>
+      <p:pic>
+        <p:nvPicPr>
+          <p:cNvPr id="4" name="Picture 3" descr="inside_circle_logo.png"/>
+          <p:cNvPicPr>
+            <a:picLocks noChangeAspect="1"/>
+          </p:cNvPicPr>
+          <p:nvPr/>
+        </p:nvPicPr>
+        <p:blipFill>
+          <a:blip r:embed="rId2"/>
+          <a:stretch>
+            <a:fillRect/>
+          </a:stretch>
+        </p:blipFill>
+        <p:spPr>
+          <a:xfrm>
+            <a:off x="10660000" y="130000"/>
+            <a:ext cx="1302000" cy="420000"/>
+          </a:xfrm>
+          <a:prstGeom prst="rect">
+            <a:avLst/>
+          </a:prstGeom>
+        </p:spPr>
+      </p:pic>
+      <p:sp>
+        <p:nvSpPr>
+          <p:cNvPr id="5" name="TextBox 4"/>
+          <p:cNvSpPr txBox="1"/>
+          <p:nvPr/>
+        </p:nvSpPr>
+        <p:spPr>
+          <a:xfrm>
+            <a:off x="228600" y="260000"/>
+            <a:ext cx="3842800" cy="800000"/>
+          </a:xfrm>
+          <a:prstGeom prst="rect">
+            <a:avLst/>
+          </a:prstGeom>
+          <a:noFill/>
+        </p:spPr>
+        <p:txBody>
+          <a:bodyPr wrap="square" lIns="0" rIns="0" tIns="0" bIns="0">
+            <a:spAutoFit/>
+          </a:bodyPr>
+          <a:lstStyle/>
+          <a:p>
+            <a:pPr algn="l"/>
+            <a:r>
+              <a:rPr sz="4800" b="1" i="0">
+                <a:solidFill>
+                  <a:srgbClr val="3AEDE5"/>
+                </a:solidFill>
+                <a:latin typeface="Alegreya Sans"/>
+              </a:rPr>
+              <a:t>C.C.</a:t>
+            </a:r>
+          </a:p>
+        </p:txBody>
+      </p:sp>
+      <p:sp>
+        <p:nvSpPr>
+          <p:cNvPr id="6" name="TextBox 5"/>
+          <p:cNvSpPr txBox="1"/>
+          <p:nvPr/>
+        </p:nvSpPr>
+        <p:spPr>
+          <a:xfrm>
+            <a:off x="4528600" y="300000"/>
+            <a:ext cx="5963400" cy="800000"/>
+          </a:xfrm>
+          <a:prstGeom prst="rect">
+            <a:avLst/>
+          </a:prstGeom>
+          <a:noFill/>
+        </p:spPr>
+        <p:txBody>
+          <a:bodyPr wrap="square" lIns="0" rIns="0" tIns="0" bIns="0">
+            <a:spAutoFit/>
+          </a:bodyPr>
+          <a:lstStyle/>
+          <a:p>
+            <a:r>
+              <a:rPr sz="2400" b="1" i="0">
+                <a:solidFill>
+                  <a:srgbClr val="FFFFFF"/>
+                </a:solidFill>
+                <a:latin typeface="Alegreya Sans"/>
+              </a:rPr>
+              <a:t>Chargée de Communication &amp; Marketing</a:t>
+            </a:r>
+          </a:p>
+          <a:p>
+            <a:pPr>
+              <a:spcBef>
+                <a:spcPts val="200"/>
+              </a:spcBef>
+            </a:pPr>
+            <a:r>
+              <a:rPr sz="1500" b="0" i="1">
+                <a:solidFill>
+                  <a:srgbClr val="3AEDE5"/>
+                </a:solidFill>
+                <a:latin typeface="Alegreya Sans"/>
+              </a:rPr>
+              <a:t>Communication &amp; Marketing — Alternance Sept. 2026</a:t>
+            </a:r>
+          </a:p>
+        </p:txBody>
+      </p:sp>
+      <p:sp>
+        <p:nvSpPr>
+          <p:cNvPr id="7" name="TextBox 6"/>
+          <p:cNvSpPr txBox="1"/>
+          <p:nvPr/>
+        </p:nvSpPr>
+        <p:spPr>
+          <a:xfrm>
+            <a:off x="228600" y="1180000"/>
+            <a:ext cx="3842800" cy="5318000"/>
+          </a:xfrm>
+          <a:prstGeom prst="rect">
+            <a:avLst/>
+          </a:prstGeom>
+          <a:noFill/>
+        </p:spPr>
+        <p:txBody>
+          <a:bodyPr wrap="square" lIns="0" rIns="0" tIns="0" bIns="0">
+            <a:spAutoFit/>
+          </a:bodyPr>
+          <a:lstStyle/>
+          <a:p>
+            <a:pPr algn="l">
+              <a:spcAft>
+                <a:spcPts val="300"/>
+              </a:spcAft>
+            </a:pPr>
+            <a:r>
+              <a:rPr sz="1300" b="1" i="0">
+                <a:solidFill>
+                  <a:srgbClr val="3AEDE5"/>
+                </a:solidFill>
+                <a:latin typeface="Alegreya Sans"/>
+              </a:rPr>
+              <a:t>DOMAINES D'EXPERTISE</a:t>
+            </a:r>
+          </a:p>
+          <a:p>
+            <a:pPr algn="l">
+              <a:spcAft>
+                <a:spcPts val="100"/>
+              </a:spcAft>
+            </a:pPr>
+            <a:r>
+              <a:rPr sz="1200" b="1" i="0">
+                <a:solidFill>
+                  <a:srgbClr val="3AEDE5"/>
+                </a:solidFill>
+                <a:latin typeface="Alegreya Sans"/>
+              </a:rPr>
+              <a:t>•  </a:t>
+            </a:r>
+            <a:r>
+              <a:rPr sz="1200" b="0" i="0">
+                <a:solidFill>
+                  <a:srgbClr val="FFFFFF"/>
+                </a:solidFill>
+                <a:latin typeface="Alegreya Sans"/>
+              </a:rPr>
+              <a:t>Stratégie de communication</a:t>
+            </a:r>
+          </a:p>
+          <a:p>
+            <a:pPr algn="l">
+              <a:spcAft>
+                <a:spcPts val="100"/>
+              </a:spcAft>
+            </a:pPr>
+            <a:r>
+              <a:rPr sz="1200" b="1" i="0">
+                <a:solidFill>
+                  <a:srgbClr val="3AEDE5"/>
+                </a:solidFill>
+                <a:latin typeface="Alegreya Sans"/>
+              </a:rPr>
+              <a:t>•  </a:t>
+            </a:r>
+            <a:r>
+              <a:rPr sz="1200" b="0" i="0">
+                <a:solidFill>
+                  <a:srgbClr val="FFFFFF"/>
+                </a:solidFill>
+                <a:latin typeface="Alegreya Sans"/>
+              </a:rPr>
+              <a:t>Organisation &amp; gestion de projet</a:t>
+            </a:r>
+          </a:p>
+          <a:p>
+            <a:pPr algn="l">
+              <a:spcAft>
+                <a:spcPts val="100"/>
+              </a:spcAft>
+            </a:pPr>
+            <a:r>
+              <a:rPr sz="1200" b="1" i="0">
+                <a:solidFill>
+                  <a:srgbClr val="3AEDE5"/>
+                </a:solidFill>
+                <a:latin typeface="Alegreya Sans"/>
+              </a:rPr>
+              <a:t>•  </a:t>
+            </a:r>
+            <a:r>
+              <a:rPr sz="1200" b="0" i="0">
+                <a:solidFill>
+                  <a:srgbClr val="FFFFFF"/>
+                </a:solidFill>
+                <a:latin typeface="Alegreya Sans"/>
+              </a:rPr>
+              <a:t>Réseaux sociaux</a:t>
+            </a:r>
+          </a:p>
+          <a:p>
+            <a:pPr algn="l">
+              <a:spcAft>
+                <a:spcPts val="100"/>
+              </a:spcAft>
+            </a:pPr>
+            <a:r>
+              <a:rPr sz="1200" b="1" i="0">
+                <a:solidFill>
+                  <a:srgbClr val="3AEDE5"/>
+                </a:solidFill>
+                <a:latin typeface="Alegreya Sans"/>
+              </a:rPr>
+              <a:t>•  </a:t>
+            </a:r>
+            <a:r>
+              <a:rPr sz="1200" b="0" i="0">
+                <a:solidFill>
+                  <a:srgbClr val="FFFFFF"/>
+                </a:solidFill>
+                <a:latin typeface="Alegreya Sans"/>
+              </a:rPr>
+              <a:t>Création de vidéo &amp; montage</a:t>
+            </a:r>
+          </a:p>
+          <a:p>
+            <a:pPr algn="l">
+              <a:spcAft>
+                <a:spcPts val="100"/>
+              </a:spcAft>
+            </a:pPr>
+            <a:r>
+              <a:rPr sz="1200" b="1" i="0">
+                <a:solidFill>
+                  <a:srgbClr val="3AEDE5"/>
+                </a:solidFill>
+                <a:latin typeface="Alegreya Sans"/>
+              </a:rPr>
+              <a:t>•  </a:t>
+            </a:r>
+            <a:r>
+              <a:rPr sz="1200" b="0" i="0">
+                <a:solidFill>
+                  <a:srgbClr val="FFFFFF"/>
+                </a:solidFill>
+                <a:latin typeface="Alegreya Sans"/>
+              </a:rPr>
+              <a:t>Coordination d'équipe</a:t>
+            </a:r>
+          </a:p>
+          <a:p>
+            <a:pPr algn="l">
+              <a:spcBef>
+                <a:spcPts val="600"/>
+              </a:spcBef>
+              <a:spcAft>
+                <a:spcPts val="300"/>
+              </a:spcAft>
+            </a:pPr>
+            <a:r>
+              <a:rPr sz="1300" b="1" i="0">
+                <a:solidFill>
+                  <a:srgbClr val="3AEDE5"/>
+                </a:solidFill>
+                <a:latin typeface="Alegreya Sans"/>
+              </a:rPr>
+              <a:t>LANGUES</a:t>
+            </a:r>
+          </a:p>
+          <a:p>
+            <a:pPr algn="l">
+              <a:spcAft>
+                <a:spcPts val="100"/>
+              </a:spcAft>
+            </a:pPr>
+            <a:r>
+              <a:rPr sz="1200" b="1" i="0">
+                <a:solidFill>
+                  <a:srgbClr val="3AEDE5"/>
+                </a:solidFill>
+                <a:latin typeface="Alegreya Sans"/>
+              </a:rPr>
+              <a:t>•  </a:t>
+            </a:r>
+            <a:r>
+              <a:rPr sz="1200" b="0" i="0">
+                <a:solidFill>
+                  <a:srgbClr val="FFFFFF"/>
+                </a:solidFill>
+                <a:latin typeface="Alegreya Sans"/>
+              </a:rPr>
+              <a:t>Français — Langue maternelle</a:t>
+            </a:r>
+          </a:p>
+          <a:p>
+            <a:pPr algn="l">
+              <a:spcAft>
+                <a:spcPts val="100"/>
+              </a:spcAft>
+            </a:pPr>
+            <a:r>
+              <a:rPr sz="1200" b="1" i="0">
+                <a:solidFill>
+                  <a:srgbClr val="3AEDE5"/>
+                </a:solidFill>
+                <a:latin typeface="Alegreya Sans"/>
+              </a:rPr>
+              <a:t>•  </a:t>
+            </a:r>
+            <a:r>
+              <a:rPr sz="1200" b="0" i="0">
+                <a:solidFill>
+                  <a:srgbClr val="FFFFFF"/>
+                </a:solidFill>
+                <a:latin typeface="Alegreya Sans"/>
+              </a:rPr>
+              <a:t>Anglais — Intermédiaire</a:t>
+            </a:r>
+          </a:p>
+          <a:p>
+            <a:pPr algn="l">
+              <a:spcBef>
+                <a:spcPts val="600"/>
+              </a:spcBef>
+              <a:spcAft>
+                <a:spcPts val="300"/>
+              </a:spcAft>
+            </a:pPr>
+            <a:r>
+              <a:rPr sz="1300" b="1" i="0">
+                <a:solidFill>
+                  <a:srgbClr val="3AEDE5"/>
+                </a:solidFill>
+                <a:latin typeface="Alegreya Sans"/>
+              </a:rPr>
+              <a:t>FORMATION &amp; CERTIFICATIONS</a:t>
+            </a:r>
+          </a:p>
+          <a:p>
+            <a:pPr algn="l">
+              <a:spcAft>
+                <a:spcPts val="100"/>
+              </a:spcAft>
+            </a:pPr>
+            <a:r>
+              <a:rPr sz="1200" b="1" i="0">
+                <a:solidFill>
+                  <a:srgbClr val="3AEDE5"/>
+                </a:solidFill>
+                <a:latin typeface="Alegreya Sans"/>
+              </a:rPr>
+              <a:t>2025  </a:t>
+            </a:r>
+            <a:r>
+              <a:rPr sz="1200" b="1" i="0">
+                <a:solidFill>
+                  <a:srgbClr val="FFFFFF"/>
+                </a:solidFill>
+                <a:latin typeface="Alegreya Sans"/>
+              </a:rPr>
+              <a:t>INSEEC (Paris 15e)</a:t>
+            </a:r>
+          </a:p>
+          <a:p>
+            <a:pPr algn="l">
+              <a:spcAft>
+                <a:spcPts val="300"/>
+              </a:spcAft>
+            </a:pPr>
+            <a:r>
+              <a:rPr sz="1200" b="0" i="1">
+                <a:solidFill>
+                  <a:srgbClr val="CCD6E8"/>
+                </a:solidFill>
+                <a:latin typeface="Alegreya Sans"/>
+              </a:rPr>
+              <a:t>M1 Marketing &amp; Communication</a:t>
+            </a:r>
+          </a:p>
+          <a:p>
+            <a:pPr algn="l">
+              <a:spcAft>
+                <a:spcPts val="100"/>
+              </a:spcAft>
+            </a:pPr>
+            <a:r>
+              <a:rPr sz="1200" b="1" i="0">
+                <a:solidFill>
+                  <a:srgbClr val="3AEDE5"/>
+                </a:solidFill>
+                <a:latin typeface="Alegreya Sans"/>
+              </a:rPr>
+              <a:t>2023 — 2025  </a:t>
+            </a:r>
+            <a:r>
+              <a:rPr sz="1200" b="1" i="0">
+                <a:solidFill>
+                  <a:srgbClr val="FFFFFF"/>
+                </a:solidFill>
+                <a:latin typeface="Alegreya Sans"/>
+              </a:rPr>
+              <a:t>ESGCI (Paris 11e)</a:t>
+            </a:r>
+          </a:p>
+          <a:p>
+            <a:pPr algn="l">
+              <a:spcAft>
+                <a:spcPts val="300"/>
+              </a:spcAft>
+            </a:pPr>
+            <a:r>
+              <a:rPr sz="1200" b="0" i="1">
+                <a:solidFill>
+                  <a:srgbClr val="CCD6E8"/>
+                </a:solidFill>
+                <a:latin typeface="Alegreya Sans"/>
+              </a:rPr>
+              <a:t>Bachelor 3 Com événementielle &amp; Digital</a:t>
+            </a:r>
+          </a:p>
+          <a:p>
+            <a:pPr algn="l">
+              <a:spcAft>
+                <a:spcPts val="100"/>
+              </a:spcAft>
+            </a:pPr>
+            <a:r>
+              <a:rPr sz="1200" b="1" i="0">
+                <a:solidFill>
+                  <a:srgbClr val="3AEDE5"/>
+                </a:solidFill>
+                <a:latin typeface="Alegreya Sans"/>
+              </a:rPr>
+              <a:t>2022 — 2023  </a:t>
+            </a:r>
+            <a:r>
+              <a:rPr sz="1200" b="1" i="0">
+                <a:solidFill>
+                  <a:srgbClr val="FFFFFF"/>
+                </a:solidFill>
+                <a:latin typeface="Alegreya Sans"/>
+              </a:rPr>
+              <a:t>UPEC (Créteil)</a:t>
+            </a:r>
+          </a:p>
+          <a:p>
+            <a:pPr algn="l">
+              <a:spcAft>
+                <a:spcPts val="300"/>
+              </a:spcAft>
+            </a:pPr>
+            <a:r>
+              <a:rPr sz="1200" b="0" i="1">
+                <a:solidFill>
+                  <a:srgbClr val="CCD6E8"/>
+                </a:solidFill>
+                <a:latin typeface="Alegreya Sans"/>
+              </a:rPr>
+              <a:t>DEUST 1 Bureautique &amp; Com Multimédia</a:t>
+            </a:r>
+          </a:p>
+          <a:p>
+            <a:pPr algn="l">
+              <a:spcBef>
+                <a:spcPts val="600"/>
+              </a:spcBef>
+              <a:spcAft>
+                <a:spcPts val="300"/>
+              </a:spcAft>
+            </a:pPr>
+            <a:r>
+              <a:rPr sz="1300" b="1" i="0">
+                <a:solidFill>
+                  <a:srgbClr val="3AEDE5"/>
+                </a:solidFill>
+                <a:latin typeface="Alegreya Sans"/>
+              </a:rPr>
+              <a:t>CENTRES D'INTÉRÊT</a:t>
+            </a:r>
+          </a:p>
+          <a:p>
+            <a:pPr algn="l">
+              <a:spcAft>
+                <a:spcPts val="100"/>
+              </a:spcAft>
+            </a:pPr>
+            <a:r>
+              <a:rPr sz="1200" b="1" i="0">
+                <a:solidFill>
+                  <a:srgbClr val="3AEDE5"/>
+                </a:solidFill>
+                <a:latin typeface="Alegreya Sans"/>
+              </a:rPr>
+              <a:t>•  </a:t>
+            </a:r>
+            <a:r>
+              <a:rPr sz="1200" b="0" i="0">
+                <a:solidFill>
+                  <a:srgbClr val="FFFFFF"/>
+                </a:solidFill>
+                <a:latin typeface="Alegreya Sans"/>
+              </a:rPr>
+              <a:t>Voyage</a:t>
+            </a:r>
+          </a:p>
+          <a:p>
+            <a:pPr algn="l">
+              <a:spcAft>
+                <a:spcPts val="100"/>
+              </a:spcAft>
+            </a:pPr>
+            <a:r>
+              <a:rPr sz="1200" b="1" i="0">
+                <a:solidFill>
+                  <a:srgbClr val="3AEDE5"/>
+                </a:solidFill>
+                <a:latin typeface="Alegreya Sans"/>
+              </a:rPr>
+              <a:t>•  </a:t>
+            </a:r>
+            <a:r>
+              <a:rPr sz="1200" b="0" i="0">
+                <a:solidFill>
+                  <a:srgbClr val="FFFFFF"/>
+                </a:solidFill>
+                <a:latin typeface="Alegreya Sans"/>
+              </a:rPr>
+              <a:t>Art</a:t>
+            </a:r>
+          </a:p>
+          <a:p>
+            <a:pPr algn="l">
+              <a:spcAft>
+                <a:spcPts val="100"/>
+              </a:spcAft>
+            </a:pPr>
+            <a:r>
+              <a:rPr sz="1200" b="1" i="0">
+                <a:solidFill>
+                  <a:srgbClr val="3AEDE5"/>
+                </a:solidFill>
+                <a:latin typeface="Alegreya Sans"/>
+              </a:rPr>
+              <a:t>•  </a:t>
+            </a:r>
+            <a:r>
+              <a:rPr sz="1200" b="0" i="0">
+                <a:solidFill>
+                  <a:srgbClr val="FFFFFF"/>
+                </a:solidFill>
+                <a:latin typeface="Alegreya Sans"/>
+              </a:rPr>
+              <a:t>Lecture</a:t>
+            </a:r>
+          </a:p>
+          <a:p>
+            <a:pPr algn="l">
+              <a:spcAft>
+                <a:spcPts val="100"/>
+              </a:spcAft>
+            </a:pPr>
+            <a:r>
+              <a:rPr sz="1200" b="1" i="0">
+                <a:solidFill>
+                  <a:srgbClr val="3AEDE5"/>
+                </a:solidFill>
+                <a:latin typeface="Alegreya Sans"/>
+              </a:rPr>
+              <a:t>•  </a:t>
+            </a:r>
+            <a:r>
+              <a:rPr sz="1200" b="0" i="0">
+                <a:solidFill>
+                  <a:srgbClr val="FFFFFF"/>
+                </a:solidFill>
+                <a:latin typeface="Alegreya Sans"/>
+              </a:rPr>
+              <a:t>Musique</a:t>
+            </a:r>
+          </a:p>
+        </p:txBody>
+      </p:sp>
+      <p:sp>
+        <p:nvSpPr>
+          <p:cNvPr id="8" name="TextBox 7"/>
+          <p:cNvSpPr txBox="1"/>
+          <p:nvPr/>
+        </p:nvSpPr>
+        <p:spPr>
+          <a:xfrm>
+            <a:off x="4528600" y="1180000"/>
+            <a:ext cx="7434800" cy="5318000"/>
+          </a:xfrm>
+          <a:prstGeom prst="rect">
+            <a:avLst/>
+          </a:prstGeom>
+          <a:noFill/>
+        </p:spPr>
+        <p:txBody>
+          <a:bodyPr wrap="square" lIns="0" rIns="0" tIns="0" bIns="0">
+            <a:spAutoFit/>
+          </a:bodyPr>
+          <a:lstStyle/>
+          <a:p>
+            <a:pPr algn="l">
+              <a:spcAft>
+                <a:spcPts val="300"/>
+              </a:spcAft>
+            </a:pPr>
+            <a:r>
+              <a:rPr sz="1300" b="1" i="0">
+                <a:solidFill>
+                  <a:srgbClr val="3AEDE5"/>
+                </a:solidFill>
+                <a:latin typeface="Alegreya Sans"/>
+              </a:rPr>
+              <a:t>RÉSUMÉ</a:t>
+            </a:r>
+          </a:p>
+          <a:p>
+            <a:pPr algn="l">
+              <a:spcAft>
+                <a:spcPts val="300"/>
+              </a:spcAft>
+            </a:pPr>
+            <a:r>
+              <a:rPr sz="1200" b="0" i="0">
+                <a:solidFill>
+                  <a:srgbClr val="FFFFFF"/>
+                </a:solidFill>
+                <a:latin typeface="Alegreya Sans"/>
+              </a:rPr>
+              <a:t>Curieuse, créative et dotée d'un esprit analytique, je prépare ma dernière année de Master en Communication &amp; Marketing. Mon objectif : rejoindre une équipe ambitieuse où je pourrai transformer les id…</a:t>
+            </a:r>
+          </a:p>
+          <a:p>
+            <a:pPr algn="l">
+              <a:spcBef>
+                <a:spcPts val="600"/>
+              </a:spcBef>
+              <a:spcAft>
+                <a:spcPts val="300"/>
+              </a:spcAft>
+            </a:pPr>
+            <a:r>
+              <a:rPr sz="1300" b="1" i="0">
+                <a:solidFill>
+                  <a:srgbClr val="3AEDE5"/>
+                </a:solidFill>
+                <a:latin typeface="Alegreya Sans"/>
+              </a:rPr>
+              <a:t>EXPÉRIENCE PROFESSIONNELLE</a:t>
+            </a:r>
+          </a:p>
+          <a:p>
+            <a:pPr algn="l">
+              <a:spcAft>
+                <a:spcPts val="100"/>
+              </a:spcAft>
+            </a:pPr>
+            <a:r>
+              <a:rPr sz="1200" b="1" i="0">
+                <a:solidFill>
+                  <a:srgbClr val="3AEDE5"/>
+                </a:solidFill>
+                <a:latin typeface="Alegreya Sans"/>
+              </a:rPr>
+              <a:t>▸ </a:t>
+            </a:r>
+            <a:r>
+              <a:rPr sz="1200" b="1" i="0">
+                <a:solidFill>
+                  <a:srgbClr val="FFFFFF"/>
+                </a:solidFill>
+                <a:latin typeface="Alegreya Sans"/>
+              </a:rPr>
+              <a:t>Leroy Merlin</a:t>
+            </a:r>
+            <a:r>
+              <a:rPr sz="1200" b="0" i="0">
+                <a:solidFill>
+                  <a:srgbClr val="FFFFFF"/>
+                </a:solidFill>
+                <a:latin typeface="Alegreya Sans"/>
+              </a:rPr>
+              <a:t> — Community Manager — alternance</a:t>
+            </a:r>
+            <a:r>
+              <a:rPr sz="1200" b="0" i="1">
+                <a:solidFill>
+                  <a:srgbClr val="3AEDE5"/>
+                </a:solidFill>
+                <a:latin typeface="Alegreya Sans"/>
+              </a:rPr>
+              <a:t>  (Sept. 2025 — Actuel)</a:t>
+            </a:r>
+          </a:p>
+          <a:p>
+            <a:pPr algn="l" lvl="1">
+              <a:spcAft>
+                <a:spcPts val="100"/>
+              </a:spcAft>
+            </a:pPr>
+            <a:r>
+              <a:rPr sz="1200" b="1" i="0">
+                <a:solidFill>
+                  <a:srgbClr val="3AEDE5"/>
+                </a:solidFill>
+                <a:latin typeface="Alegreya Sans"/>
+              </a:rPr>
+              <a:t>•  </a:t>
+            </a:r>
+            <a:r>
+              <a:rPr sz="1200" b="0" i="0">
+                <a:solidFill>
+                  <a:srgbClr val="FFFFFF"/>
+                </a:solidFill>
+                <a:latin typeface="Alegreya Sans"/>
+              </a:rPr>
+              <a:t>Animation et modération des communautés ; création et diffusion de contenus engageants (posts, vidéos, stories).</a:t>
+            </a:r>
+          </a:p>
+          <a:p>
+            <a:pPr algn="l" lvl="1">
+              <a:spcAft>
+                <a:spcPts val="100"/>
+              </a:spcAft>
+            </a:pPr>
+            <a:r>
+              <a:rPr sz="1200" b="1" i="0">
+                <a:solidFill>
+                  <a:srgbClr val="3AEDE5"/>
+                </a:solidFill>
+                <a:latin typeface="Alegreya Sans"/>
+              </a:rPr>
+              <a:t>•  </a:t>
+            </a:r>
+            <a:r>
+              <a:rPr sz="1200" b="0" i="0">
+                <a:solidFill>
+                  <a:srgbClr val="FFFFFF"/>
+                </a:solidFill>
+                <a:latin typeface="Alegreya Sans"/>
+              </a:rPr>
+              <a:t>Gestion de la e-réputation et de la relation client en ligne ; reporting des actions social media.</a:t>
+            </a:r>
+          </a:p>
+          <a:p>
+            <a:pPr algn="l">
+              <a:spcAft>
+                <a:spcPts val="100"/>
+              </a:spcAft>
+            </a:pPr>
+            <a:r>
+              <a:rPr sz="1200" b="1" i="0">
+                <a:solidFill>
+                  <a:srgbClr val="3AEDE5"/>
+                </a:solidFill>
+                <a:latin typeface="Alegreya Sans"/>
+              </a:rPr>
+              <a:t>▸ </a:t>
+            </a:r>
+            <a:r>
+              <a:rPr sz="1200" b="1" i="0">
+                <a:solidFill>
+                  <a:srgbClr val="FFFFFF"/>
+                </a:solidFill>
+                <a:latin typeface="Alegreya Sans"/>
+              </a:rPr>
+              <a:t>Technema</a:t>
+            </a:r>
+            <a:r>
+              <a:rPr sz="1200" b="0" i="0">
+                <a:solidFill>
+                  <a:srgbClr val="FFFFFF"/>
+                </a:solidFill>
+                <a:latin typeface="Alegreya Sans"/>
+              </a:rPr>
+              <a:t> — Marketing &amp; Communication interne/externe — alternance</a:t>
+            </a:r>
+            <a:r>
+              <a:rPr sz="1200" b="0" i="1">
+                <a:solidFill>
+                  <a:srgbClr val="3AEDE5"/>
+                </a:solidFill>
+                <a:latin typeface="Alegreya Sans"/>
+              </a:rPr>
+              <a:t>  (2024 — 2025)</a:t>
+            </a:r>
+          </a:p>
+          <a:p>
+            <a:pPr algn="l" lvl="1">
+              <a:spcAft>
+                <a:spcPts val="100"/>
+              </a:spcAft>
+            </a:pPr>
+            <a:r>
+              <a:rPr sz="1200" b="1" i="0">
+                <a:solidFill>
+                  <a:srgbClr val="3AEDE5"/>
+                </a:solidFill>
+                <a:latin typeface="Alegreya Sans"/>
+              </a:rPr>
+              <a:t>•  </a:t>
+            </a:r>
+            <a:r>
+              <a:rPr sz="1200" b="0" i="0">
+                <a:solidFill>
+                  <a:srgbClr val="FFFFFF"/>
+                </a:solidFill>
+                <a:latin typeface="Alegreya Sans"/>
+              </a:rPr>
+              <a:t>Réactualisation en équipe de la base de données fiche client ; refonte des codes articles et familles dans l'ERP.</a:t>
+            </a:r>
+          </a:p>
+          <a:p>
+            <a:pPr algn="l" lvl="1">
+              <a:spcAft>
+                <a:spcPts val="100"/>
+              </a:spcAft>
+            </a:pPr>
+            <a:r>
+              <a:rPr sz="1200" b="1" i="0">
+                <a:solidFill>
+                  <a:srgbClr val="3AEDE5"/>
+                </a:solidFill>
+                <a:latin typeface="Alegreya Sans"/>
+              </a:rPr>
+              <a:t>•  </a:t>
+            </a:r>
+            <a:r>
+              <a:rPr sz="1200" b="0" i="0">
+                <a:solidFill>
+                  <a:srgbClr val="FFFFFF"/>
+                </a:solidFill>
+                <a:latin typeface="Alegreya Sans"/>
+              </a:rPr>
+              <a:t>Plans de communication sur les thématiques produits (module CO2, coffre en ligne, services d'infogérance).</a:t>
+            </a:r>
+          </a:p>
+          <a:p>
+            <a:pPr algn="l">
+              <a:spcAft>
+                <a:spcPts val="100"/>
+              </a:spcAft>
+            </a:pPr>
+            <a:r>
+              <a:rPr sz="1200" b="1" i="0">
+                <a:solidFill>
+                  <a:srgbClr val="3AEDE5"/>
+                </a:solidFill>
+                <a:latin typeface="Alegreya Sans"/>
+              </a:rPr>
+              <a:t>▸ </a:t>
+            </a:r>
+            <a:r>
+              <a:rPr sz="1200" b="1" i="0">
+                <a:solidFill>
+                  <a:srgbClr val="FFFFFF"/>
+                </a:solidFill>
+                <a:latin typeface="Alegreya Sans"/>
+              </a:rPr>
+              <a:t>Rêver d'Ailleurs</a:t>
+            </a:r>
+            <a:r>
+              <a:rPr sz="1200" b="0" i="0">
+                <a:solidFill>
+                  <a:srgbClr val="FFFFFF"/>
+                </a:solidFill>
+                <a:latin typeface="Alegreya Sans"/>
+              </a:rPr>
+              <a:t> — Stage Communication — Événementiel</a:t>
+            </a:r>
+            <a:r>
+              <a:rPr sz="1200" b="0" i="1">
+                <a:solidFill>
+                  <a:srgbClr val="3AEDE5"/>
+                </a:solidFill>
+                <a:latin typeface="Alegreya Sans"/>
+              </a:rPr>
+              <a:t>  (2024 — 4 mois)</a:t>
+            </a:r>
+          </a:p>
+          <a:p>
+            <a:pPr algn="l" lvl="1">
+              <a:spcAft>
+                <a:spcPts val="100"/>
+              </a:spcAft>
+            </a:pPr>
+            <a:r>
+              <a:rPr sz="1200" b="1" i="0">
+                <a:solidFill>
+                  <a:srgbClr val="3AEDE5"/>
+                </a:solidFill>
+                <a:latin typeface="Alegreya Sans"/>
+              </a:rPr>
+              <a:t>•  </a:t>
+            </a:r>
+            <a:r>
+              <a:rPr sz="1200" b="0" i="0">
+                <a:solidFill>
+                  <a:srgbClr val="FFFFFF"/>
+                </a:solidFill>
+                <a:latin typeface="Alegreya Sans"/>
+              </a:rPr>
+              <a:t>Rédaction, planification, organisation et animation d'événements ; création de visuels et de contenus.</a:t>
+            </a:r>
+          </a:p>
+          <a:p>
+            <a:pPr algn="l">
+              <a:spcAft>
+                <a:spcPts val="100"/>
+              </a:spcAft>
+            </a:pPr>
+            <a:r>
+              <a:rPr sz="1200" b="1" i="0">
+                <a:solidFill>
+                  <a:srgbClr val="3AEDE5"/>
+                </a:solidFill>
+                <a:latin typeface="Alegreya Sans"/>
+              </a:rPr>
+              <a:t>▸ </a:t>
+            </a:r>
+            <a:r>
+              <a:rPr sz="1200" b="1" i="0">
+                <a:solidFill>
+                  <a:srgbClr val="FFFFFF"/>
+                </a:solidFill>
+                <a:latin typeface="Alegreya Sans"/>
+              </a:rPr>
+              <a:t>Athlon</a:t>
+            </a:r>
+            <a:r>
+              <a:rPr sz="1200" b="0" i="0">
+                <a:solidFill>
+                  <a:srgbClr val="FFFFFF"/>
+                </a:solidFill>
+                <a:latin typeface="Alegreya Sans"/>
+              </a:rPr>
+              <a:t> — Stage Communication interne</a:t>
+            </a:r>
+            <a:r>
+              <a:rPr sz="1200" b="0" i="1">
+                <a:solidFill>
+                  <a:srgbClr val="3AEDE5"/>
+                </a:solidFill>
+                <a:latin typeface="Alegreya Sans"/>
+              </a:rPr>
+              <a:t>  (2023 — 4 mois)</a:t>
+            </a:r>
+          </a:p>
+          <a:p>
+            <a:pPr algn="l" lvl="1">
+              <a:spcAft>
+                <a:spcPts val="100"/>
+              </a:spcAft>
+            </a:pPr>
+            <a:r>
+              <a:rPr sz="1200" b="1" i="0">
+                <a:solidFill>
+                  <a:srgbClr val="3AEDE5"/>
+                </a:solidFill>
+                <a:latin typeface="Alegreya Sans"/>
+              </a:rPr>
+              <a:t>•  </a:t>
+            </a:r>
+            <a:r>
+              <a:rPr sz="1200" b="0" i="0">
+                <a:solidFill>
+                  <a:srgbClr val="FFFFFF"/>
+                </a:solidFill>
+                <a:latin typeface="Alegreya Sans"/>
+              </a:rPr>
+              <a:t>Rédaction du livret d'accueil de l'entreprise ; création de visuels et vidéos.</a:t>
+            </a:r>
+          </a:p>
+          <a:p>
+            <a:pPr algn="l" lvl="1">
+              <a:spcAft>
+                <a:spcPts val="100"/>
+              </a:spcAft>
+            </a:pPr>
+            <a:r>
+              <a:rPr sz="1200" b="1" i="0">
+                <a:solidFill>
+                  <a:srgbClr val="3AEDE5"/>
+                </a:solidFill>
+                <a:latin typeface="Alegreya Sans"/>
+              </a:rPr>
+              <a:t>•  </a:t>
+            </a:r>
+            <a:r>
+              <a:rPr sz="1200" b="0" i="0">
+                <a:solidFill>
+                  <a:srgbClr val="FFFFFF"/>
+                </a:solidFill>
+                <a:latin typeface="Alegreya Sans"/>
+              </a:rPr>
+              <a:t>Recherches interne/externe sur des concepts modernes ; logique rédactionnelle entre thématiques.</a:t>
+            </a:r>
+          </a:p>
+        </p:txBody>
+      </p:sp>
+      <p:sp>
+        <p:nvSpPr>
+          <p:cNvPr id="9" name="Rectangle 8"/>
           <p:cNvSpPr/>
           <p:nvPr/>
         </p:nvSpPr>
@@ -3232,1030 +4245,6 @@
           </a:p>
         </p:txBody>
       </p:sp>
-      <p:pic>
-        <p:nvPicPr>
-          <p:cNvPr id="5" name="Picture 4" descr="inside_circle_logo.png"/>
-          <p:cNvPicPr>
-            <a:picLocks noChangeAspect="1"/>
-          </p:cNvPicPr>
-          <p:nvPr/>
-        </p:nvPicPr>
-        <p:blipFill>
-          <a:blip r:embed="rId2"/>
-          <a:stretch>
-            <a:fillRect/>
-          </a:stretch>
-        </p:blipFill>
-        <p:spPr>
-          <a:xfrm>
-            <a:off x="10660000" y="130000"/>
-            <a:ext cx="1302000" cy="420000"/>
-          </a:xfrm>
-          <a:prstGeom prst="rect">
-            <a:avLst/>
-          </a:prstGeom>
-        </p:spPr>
-      </p:pic>
-      <p:sp>
-        <p:nvSpPr>
-          <p:cNvPr id="6" name="TextBox 5"/>
-          <p:cNvSpPr txBox="1"/>
-          <p:nvPr/>
-        </p:nvSpPr>
-        <p:spPr>
-          <a:xfrm>
-            <a:off x="228600" y="260000"/>
-            <a:ext cx="3842800" cy="800000"/>
-          </a:xfrm>
-          <a:prstGeom prst="rect">
-            <a:avLst/>
-          </a:prstGeom>
-          <a:noFill/>
-        </p:spPr>
-        <p:txBody>
-          <a:bodyPr wrap="square" lIns="0" rIns="0" tIns="0" bIns="0">
-            <a:spAutoFit/>
-          </a:bodyPr>
-          <a:lstStyle/>
-          <a:p>
-            <a:pPr algn="l"/>
-            <a:r>
-              <a:rPr sz="4800" b="1" i="0">
-                <a:solidFill>
-                  <a:srgbClr val="3AEDE5"/>
-                </a:solidFill>
-                <a:latin typeface="Alegreya Sans"/>
-              </a:rPr>
-              <a:t>C.C.</a:t>
-            </a:r>
-          </a:p>
-        </p:txBody>
-      </p:sp>
-      <p:sp>
-        <p:nvSpPr>
-          <p:cNvPr id="7" name="TextBox 6"/>
-          <p:cNvSpPr txBox="1"/>
-          <p:nvPr/>
-        </p:nvSpPr>
-        <p:spPr>
-          <a:xfrm>
-            <a:off x="4528600" y="300000"/>
-            <a:ext cx="5963400" cy="800000"/>
-          </a:xfrm>
-          <a:prstGeom prst="rect">
-            <a:avLst/>
-          </a:prstGeom>
-          <a:noFill/>
-        </p:spPr>
-        <p:txBody>
-          <a:bodyPr wrap="square" lIns="0" rIns="0" tIns="0" bIns="0">
-            <a:spAutoFit/>
-          </a:bodyPr>
-          <a:lstStyle/>
-          <a:p>
-            <a:r>
-              <a:rPr sz="2400" b="1" i="0">
-                <a:solidFill>
-                  <a:srgbClr val="FFFFFF"/>
-                </a:solidFill>
-                <a:latin typeface="Alegreya Sans"/>
-              </a:rPr>
-              <a:t>Chargée de Communication &amp; Marketing</a:t>
-            </a:r>
-          </a:p>
-          <a:p>
-            <a:pPr>
-              <a:spcBef>
-                <a:spcPts val="200"/>
-              </a:spcBef>
-            </a:pPr>
-            <a:r>
-              <a:rPr sz="1500" b="0" i="1">
-                <a:solidFill>
-                  <a:srgbClr val="3AEDE5"/>
-                </a:solidFill>
-                <a:latin typeface="Alegreya Sans"/>
-              </a:rPr>
-              <a:t>Communication &amp; Marketing — Alternance Sept. 2026</a:t>
-            </a:r>
-          </a:p>
-        </p:txBody>
-      </p:sp>
-      <p:sp>
-        <p:nvSpPr>
-          <p:cNvPr id="8" name="TextBox 7"/>
-          <p:cNvSpPr txBox="1"/>
-          <p:nvPr/>
-        </p:nvSpPr>
-        <p:spPr>
-          <a:xfrm>
-            <a:off x="228600" y="1180000"/>
-            <a:ext cx="3842800" cy="5318000"/>
-          </a:xfrm>
-          <a:prstGeom prst="rect">
-            <a:avLst/>
-          </a:prstGeom>
-          <a:noFill/>
-        </p:spPr>
-        <p:txBody>
-          <a:bodyPr wrap="square" lIns="0" rIns="0" tIns="0" bIns="0">
-            <a:spAutoFit/>
-          </a:bodyPr>
-          <a:lstStyle/>
-          <a:p>
-            <a:pPr algn="l">
-              <a:spcAft>
-                <a:spcPts val="300"/>
-              </a:spcAft>
-            </a:pPr>
-            <a:r>
-              <a:rPr sz="1300" b="1" i="0">
-                <a:solidFill>
-                  <a:srgbClr val="3AEDE5"/>
-                </a:solidFill>
-                <a:latin typeface="Alegreya Sans"/>
-              </a:rPr>
-              <a:t>DOMAINES D'EXPERTISE</a:t>
-            </a:r>
-          </a:p>
-          <a:p>
-            <a:pPr algn="l">
-              <a:spcAft>
-                <a:spcPts val="100"/>
-              </a:spcAft>
-            </a:pPr>
-            <a:r>
-              <a:rPr sz="1200" b="1" i="0">
-                <a:solidFill>
-                  <a:srgbClr val="3AEDE5"/>
-                </a:solidFill>
-                <a:latin typeface="Alegreya Sans"/>
-              </a:rPr>
-              <a:t>•  </a:t>
-            </a:r>
-            <a:r>
-              <a:rPr sz="1200" b="0" i="0">
-                <a:solidFill>
-                  <a:srgbClr val="FFFFFF"/>
-                </a:solidFill>
-                <a:latin typeface="Alegreya Sans"/>
-              </a:rPr>
-              <a:t>Stratégie de communication</a:t>
-            </a:r>
-          </a:p>
-          <a:p>
-            <a:pPr algn="l">
-              <a:spcAft>
-                <a:spcPts val="100"/>
-              </a:spcAft>
-            </a:pPr>
-            <a:r>
-              <a:rPr sz="1200" b="1" i="0">
-                <a:solidFill>
-                  <a:srgbClr val="3AEDE5"/>
-                </a:solidFill>
-                <a:latin typeface="Alegreya Sans"/>
-              </a:rPr>
-              <a:t>•  </a:t>
-            </a:r>
-            <a:r>
-              <a:rPr sz="1200" b="0" i="0">
-                <a:solidFill>
-                  <a:srgbClr val="FFFFFF"/>
-                </a:solidFill>
-                <a:latin typeface="Alegreya Sans"/>
-              </a:rPr>
-              <a:t>Organisation &amp; gestion de projet</a:t>
-            </a:r>
-          </a:p>
-          <a:p>
-            <a:pPr algn="l">
-              <a:spcAft>
-                <a:spcPts val="100"/>
-              </a:spcAft>
-            </a:pPr>
-            <a:r>
-              <a:rPr sz="1200" b="1" i="0">
-                <a:solidFill>
-                  <a:srgbClr val="3AEDE5"/>
-                </a:solidFill>
-                <a:latin typeface="Alegreya Sans"/>
-              </a:rPr>
-              <a:t>•  </a:t>
-            </a:r>
-            <a:r>
-              <a:rPr sz="1200" b="0" i="0">
-                <a:solidFill>
-                  <a:srgbClr val="FFFFFF"/>
-                </a:solidFill>
-                <a:latin typeface="Alegreya Sans"/>
-              </a:rPr>
-              <a:t>Réseaux sociaux</a:t>
-            </a:r>
-          </a:p>
-          <a:p>
-            <a:pPr algn="l">
-              <a:spcAft>
-                <a:spcPts val="100"/>
-              </a:spcAft>
-            </a:pPr>
-            <a:r>
-              <a:rPr sz="1200" b="1" i="0">
-                <a:solidFill>
-                  <a:srgbClr val="3AEDE5"/>
-                </a:solidFill>
-                <a:latin typeface="Alegreya Sans"/>
-              </a:rPr>
-              <a:t>•  </a:t>
-            </a:r>
-            <a:r>
-              <a:rPr sz="1200" b="0" i="0">
-                <a:solidFill>
-                  <a:srgbClr val="FFFFFF"/>
-                </a:solidFill>
-                <a:latin typeface="Alegreya Sans"/>
-              </a:rPr>
-              <a:t>Création de vidéo &amp; montage</a:t>
-            </a:r>
-          </a:p>
-          <a:p>
-            <a:pPr algn="l">
-              <a:spcAft>
-                <a:spcPts val="100"/>
-              </a:spcAft>
-            </a:pPr>
-            <a:r>
-              <a:rPr sz="1200" b="1" i="0">
-                <a:solidFill>
-                  <a:srgbClr val="3AEDE5"/>
-                </a:solidFill>
-                <a:latin typeface="Alegreya Sans"/>
-              </a:rPr>
-              <a:t>•  </a:t>
-            </a:r>
-            <a:r>
-              <a:rPr sz="1200" b="0" i="0">
-                <a:solidFill>
-                  <a:srgbClr val="FFFFFF"/>
-                </a:solidFill>
-                <a:latin typeface="Alegreya Sans"/>
-              </a:rPr>
-              <a:t>Coordination d'équipe</a:t>
-            </a:r>
-          </a:p>
-          <a:p>
-            <a:pPr algn="l">
-              <a:spcBef>
-                <a:spcPts val="600"/>
-              </a:spcBef>
-              <a:spcAft>
-                <a:spcPts val="300"/>
-              </a:spcAft>
-            </a:pPr>
-            <a:r>
-              <a:rPr sz="1300" b="1" i="0">
-                <a:solidFill>
-                  <a:srgbClr val="3AEDE5"/>
-                </a:solidFill>
-                <a:latin typeface="Alegreya Sans"/>
-              </a:rPr>
-              <a:t>LANGUES</a:t>
-            </a:r>
-          </a:p>
-          <a:p>
-            <a:pPr algn="l">
-              <a:spcAft>
-                <a:spcPts val="100"/>
-              </a:spcAft>
-            </a:pPr>
-            <a:r>
-              <a:rPr sz="1200" b="1" i="0">
-                <a:solidFill>
-                  <a:srgbClr val="3AEDE5"/>
-                </a:solidFill>
-                <a:latin typeface="Alegreya Sans"/>
-              </a:rPr>
-              <a:t>•  </a:t>
-            </a:r>
-            <a:r>
-              <a:rPr sz="1200" b="0" i="0">
-                <a:solidFill>
-                  <a:srgbClr val="FFFFFF"/>
-                </a:solidFill>
-                <a:latin typeface="Alegreya Sans"/>
-              </a:rPr>
-              <a:t>Français — Langue maternelle</a:t>
-            </a:r>
-          </a:p>
-          <a:p>
-            <a:pPr algn="l">
-              <a:spcAft>
-                <a:spcPts val="100"/>
-              </a:spcAft>
-            </a:pPr>
-            <a:r>
-              <a:rPr sz="1200" b="1" i="0">
-                <a:solidFill>
-                  <a:srgbClr val="3AEDE5"/>
-                </a:solidFill>
-                <a:latin typeface="Alegreya Sans"/>
-              </a:rPr>
-              <a:t>•  </a:t>
-            </a:r>
-            <a:r>
-              <a:rPr sz="1200" b="0" i="0">
-                <a:solidFill>
-                  <a:srgbClr val="FFFFFF"/>
-                </a:solidFill>
-                <a:latin typeface="Alegreya Sans"/>
-              </a:rPr>
-              <a:t>Anglais — Intermédiaire</a:t>
-            </a:r>
-          </a:p>
-          <a:p>
-            <a:pPr algn="l">
-              <a:spcBef>
-                <a:spcPts val="600"/>
-              </a:spcBef>
-              <a:spcAft>
-                <a:spcPts val="300"/>
-              </a:spcAft>
-            </a:pPr>
-            <a:r>
-              <a:rPr sz="1300" b="1" i="0">
-                <a:solidFill>
-                  <a:srgbClr val="3AEDE5"/>
-                </a:solidFill>
-                <a:latin typeface="Alegreya Sans"/>
-              </a:rPr>
-              <a:t>FORMATION &amp; CERTIFICATIONS</a:t>
-            </a:r>
-          </a:p>
-          <a:p>
-            <a:pPr algn="l">
-              <a:spcAft>
-                <a:spcPts val="100"/>
-              </a:spcAft>
-            </a:pPr>
-            <a:r>
-              <a:rPr sz="1200" b="1" i="0">
-                <a:solidFill>
-                  <a:srgbClr val="3AEDE5"/>
-                </a:solidFill>
-                <a:latin typeface="Alegreya Sans"/>
-              </a:rPr>
-              <a:t>2025  </a:t>
-            </a:r>
-            <a:r>
-              <a:rPr sz="1200" b="1" i="0">
-                <a:solidFill>
-                  <a:srgbClr val="FFFFFF"/>
-                </a:solidFill>
-                <a:latin typeface="Alegreya Sans"/>
-              </a:rPr>
-              <a:t>INSEEC (Paris 15e)</a:t>
-            </a:r>
-          </a:p>
-          <a:p>
-            <a:pPr algn="l">
-              <a:spcAft>
-                <a:spcPts val="300"/>
-              </a:spcAft>
-            </a:pPr>
-            <a:r>
-              <a:rPr sz="1200" b="0" i="1">
-                <a:solidFill>
-                  <a:srgbClr val="CCD6E8"/>
-                </a:solidFill>
-                <a:latin typeface="Alegreya Sans"/>
-              </a:rPr>
-              <a:t>M1 Marketing &amp; Communication</a:t>
-            </a:r>
-          </a:p>
-          <a:p>
-            <a:pPr algn="l">
-              <a:spcAft>
-                <a:spcPts val="100"/>
-              </a:spcAft>
-            </a:pPr>
-            <a:r>
-              <a:rPr sz="1200" b="1" i="0">
-                <a:solidFill>
-                  <a:srgbClr val="3AEDE5"/>
-                </a:solidFill>
-                <a:latin typeface="Alegreya Sans"/>
-              </a:rPr>
-              <a:t>2023 — 2025  </a:t>
-            </a:r>
-            <a:r>
-              <a:rPr sz="1200" b="1" i="0">
-                <a:solidFill>
-                  <a:srgbClr val="FFFFFF"/>
-                </a:solidFill>
-                <a:latin typeface="Alegreya Sans"/>
-              </a:rPr>
-              <a:t>ESGCI (Paris 11e)</a:t>
-            </a:r>
-          </a:p>
-          <a:p>
-            <a:pPr algn="l">
-              <a:spcAft>
-                <a:spcPts val="300"/>
-              </a:spcAft>
-            </a:pPr>
-            <a:r>
-              <a:rPr sz="1200" b="0" i="1">
-                <a:solidFill>
-                  <a:srgbClr val="CCD6E8"/>
-                </a:solidFill>
-                <a:latin typeface="Alegreya Sans"/>
-              </a:rPr>
-              <a:t>Bachelor 3 Com événementielle &amp; Digital</a:t>
-            </a:r>
-          </a:p>
-          <a:p>
-            <a:pPr algn="l">
-              <a:spcAft>
-                <a:spcPts val="100"/>
-              </a:spcAft>
-            </a:pPr>
-            <a:r>
-              <a:rPr sz="1200" b="1" i="0">
-                <a:solidFill>
-                  <a:srgbClr val="3AEDE5"/>
-                </a:solidFill>
-                <a:latin typeface="Alegreya Sans"/>
-              </a:rPr>
-              <a:t>2022 — 2023  </a:t>
-            </a:r>
-            <a:r>
-              <a:rPr sz="1200" b="1" i="0">
-                <a:solidFill>
-                  <a:srgbClr val="FFFFFF"/>
-                </a:solidFill>
-                <a:latin typeface="Alegreya Sans"/>
-              </a:rPr>
-              <a:t>UPEC (Créteil)</a:t>
-            </a:r>
-          </a:p>
-          <a:p>
-            <a:pPr algn="l">
-              <a:spcAft>
-                <a:spcPts val="300"/>
-              </a:spcAft>
-            </a:pPr>
-            <a:r>
-              <a:rPr sz="1200" b="0" i="1">
-                <a:solidFill>
-                  <a:srgbClr val="CCD6E8"/>
-                </a:solidFill>
-                <a:latin typeface="Alegreya Sans"/>
-              </a:rPr>
-              <a:t>DEUST 1 Bureautique &amp; Com Multimédia</a:t>
-            </a:r>
-          </a:p>
-          <a:p>
-            <a:pPr algn="l">
-              <a:spcBef>
-                <a:spcPts val="600"/>
-              </a:spcBef>
-              <a:spcAft>
-                <a:spcPts val="300"/>
-              </a:spcAft>
-            </a:pPr>
-            <a:r>
-              <a:rPr sz="1300" b="1" i="0">
-                <a:solidFill>
-                  <a:srgbClr val="3AEDE5"/>
-                </a:solidFill>
-                <a:latin typeface="Alegreya Sans"/>
-              </a:rPr>
-              <a:t>CENTRES D'INTÉRÊT</a:t>
-            </a:r>
-          </a:p>
-          <a:p>
-            <a:pPr algn="l">
-              <a:spcAft>
-                <a:spcPts val="100"/>
-              </a:spcAft>
-            </a:pPr>
-            <a:r>
-              <a:rPr sz="1200" b="1" i="0">
-                <a:solidFill>
-                  <a:srgbClr val="3AEDE5"/>
-                </a:solidFill>
-                <a:latin typeface="Alegreya Sans"/>
-              </a:rPr>
-              <a:t>•  </a:t>
-            </a:r>
-            <a:r>
-              <a:rPr sz="1200" b="0" i="0">
-                <a:solidFill>
-                  <a:srgbClr val="FFFFFF"/>
-                </a:solidFill>
-                <a:latin typeface="Alegreya Sans"/>
-              </a:rPr>
-              <a:t>Voyage</a:t>
-            </a:r>
-          </a:p>
-          <a:p>
-            <a:pPr algn="l">
-              <a:spcAft>
-                <a:spcPts val="100"/>
-              </a:spcAft>
-            </a:pPr>
-            <a:r>
-              <a:rPr sz="1200" b="1" i="0">
-                <a:solidFill>
-                  <a:srgbClr val="3AEDE5"/>
-                </a:solidFill>
-                <a:latin typeface="Alegreya Sans"/>
-              </a:rPr>
-              <a:t>•  </a:t>
-            </a:r>
-            <a:r>
-              <a:rPr sz="1200" b="0" i="0">
-                <a:solidFill>
-                  <a:srgbClr val="FFFFFF"/>
-                </a:solidFill>
-                <a:latin typeface="Alegreya Sans"/>
-              </a:rPr>
-              <a:t>Art</a:t>
-            </a:r>
-          </a:p>
-          <a:p>
-            <a:pPr algn="l">
-              <a:spcAft>
-                <a:spcPts val="100"/>
-              </a:spcAft>
-            </a:pPr>
-            <a:r>
-              <a:rPr sz="1200" b="1" i="0">
-                <a:solidFill>
-                  <a:srgbClr val="3AEDE5"/>
-                </a:solidFill>
-                <a:latin typeface="Alegreya Sans"/>
-              </a:rPr>
-              <a:t>•  </a:t>
-            </a:r>
-            <a:r>
-              <a:rPr sz="1200" b="0" i="0">
-                <a:solidFill>
-                  <a:srgbClr val="FFFFFF"/>
-                </a:solidFill>
-                <a:latin typeface="Alegreya Sans"/>
-              </a:rPr>
-              <a:t>Lecture</a:t>
-            </a:r>
-          </a:p>
-          <a:p>
-            <a:pPr algn="l">
-              <a:spcAft>
-                <a:spcPts val="100"/>
-              </a:spcAft>
-            </a:pPr>
-            <a:r>
-              <a:rPr sz="1200" b="1" i="0">
-                <a:solidFill>
-                  <a:srgbClr val="3AEDE5"/>
-                </a:solidFill>
-                <a:latin typeface="Alegreya Sans"/>
-              </a:rPr>
-              <a:t>•  </a:t>
-            </a:r>
-            <a:r>
-              <a:rPr sz="1200" b="0" i="0">
-                <a:solidFill>
-                  <a:srgbClr val="FFFFFF"/>
-                </a:solidFill>
-                <a:latin typeface="Alegreya Sans"/>
-              </a:rPr>
-              <a:t>Musique</a:t>
-            </a:r>
-          </a:p>
-        </p:txBody>
-      </p:sp>
-      <p:sp>
-        <p:nvSpPr>
-          <p:cNvPr id="9" name="TextBox 8"/>
-          <p:cNvSpPr txBox="1"/>
-          <p:nvPr/>
-        </p:nvSpPr>
-        <p:spPr>
-          <a:xfrm>
-            <a:off x="4528600" y="1180000"/>
-            <a:ext cx="7434800" cy="5318000"/>
-          </a:xfrm>
-          <a:prstGeom prst="rect">
-            <a:avLst/>
-          </a:prstGeom>
-          <a:noFill/>
-        </p:spPr>
-        <p:txBody>
-          <a:bodyPr wrap="square" lIns="0" rIns="0" tIns="0" bIns="0">
-            <a:spAutoFit/>
-          </a:bodyPr>
-          <a:lstStyle/>
-          <a:p>
-            <a:pPr algn="l">
-              <a:spcAft>
-                <a:spcPts val="300"/>
-              </a:spcAft>
-            </a:pPr>
-            <a:r>
-              <a:rPr sz="1300" b="1" i="0">
-                <a:solidFill>
-                  <a:srgbClr val="3AEDE5"/>
-                </a:solidFill>
-                <a:latin typeface="Alegreya Sans"/>
-              </a:rPr>
-              <a:t>RÉSUMÉ</a:t>
-            </a:r>
-          </a:p>
-          <a:p>
-            <a:pPr algn="l">
-              <a:spcAft>
-                <a:spcPts val="300"/>
-              </a:spcAft>
-            </a:pPr>
-            <a:r>
-              <a:rPr sz="1200" b="0" i="0">
-                <a:solidFill>
-                  <a:srgbClr val="FFFFFF"/>
-                </a:solidFill>
-                <a:latin typeface="Alegreya Sans"/>
-              </a:rPr>
-              <a:t>Curieuse, créative et dotée d'un esprit analytique, je prépare ma dernière année de Master en Communication &amp; Marketing. Mon objectif : rejoindre une équipe ambitieuse où je pourrai transformer les id…</a:t>
-            </a:r>
-          </a:p>
-          <a:p>
-            <a:pPr algn="l">
-              <a:spcBef>
-                <a:spcPts val="600"/>
-              </a:spcBef>
-              <a:spcAft>
-                <a:spcPts val="300"/>
-              </a:spcAft>
-            </a:pPr>
-            <a:r>
-              <a:rPr sz="1300" b="1" i="0">
-                <a:solidFill>
-                  <a:srgbClr val="3AEDE5"/>
-                </a:solidFill>
-                <a:latin typeface="Alegreya Sans"/>
-              </a:rPr>
-              <a:t>EXPÉRIENCE PROFESSIONNELLE</a:t>
-            </a:r>
-          </a:p>
-          <a:p>
-            <a:pPr algn="l">
-              <a:spcAft>
-                <a:spcPts val="100"/>
-              </a:spcAft>
-            </a:pPr>
-            <a:r>
-              <a:rPr sz="1200" b="1" i="0">
-                <a:solidFill>
-                  <a:srgbClr val="3AEDE5"/>
-                </a:solidFill>
-                <a:latin typeface="Alegreya Sans"/>
-              </a:rPr>
-              <a:t>▸ </a:t>
-            </a:r>
-            <a:r>
-              <a:rPr sz="1200" b="1" i="0">
-                <a:solidFill>
-                  <a:srgbClr val="FFFFFF"/>
-                </a:solidFill>
-                <a:latin typeface="Alegreya Sans"/>
-              </a:rPr>
-              <a:t>Leroy Merlin</a:t>
-            </a:r>
-            <a:r>
-              <a:rPr sz="1200" b="0" i="0">
-                <a:solidFill>
-                  <a:srgbClr val="FFFFFF"/>
-                </a:solidFill>
-                <a:latin typeface="Alegreya Sans"/>
-              </a:rPr>
-              <a:t> — Community Manager — alternance</a:t>
-            </a:r>
-            <a:r>
-              <a:rPr sz="1200" b="0" i="1">
-                <a:solidFill>
-                  <a:srgbClr val="3AEDE5"/>
-                </a:solidFill>
-                <a:latin typeface="Alegreya Sans"/>
-              </a:rPr>
-              <a:t>  (Sept. 2025 — Actuel)</a:t>
-            </a:r>
-          </a:p>
-          <a:p>
-            <a:pPr algn="l" lvl="1">
-              <a:spcAft>
-                <a:spcPts val="100"/>
-              </a:spcAft>
-            </a:pPr>
-            <a:r>
-              <a:rPr sz="1200" b="1" i="0">
-                <a:solidFill>
-                  <a:srgbClr val="3AEDE5"/>
-                </a:solidFill>
-                <a:latin typeface="Alegreya Sans"/>
-              </a:rPr>
-              <a:t>•  </a:t>
-            </a:r>
-            <a:r>
-              <a:rPr sz="1200" b="0" i="0">
-                <a:solidFill>
-                  <a:srgbClr val="FFFFFF"/>
-                </a:solidFill>
-                <a:latin typeface="Alegreya Sans"/>
-              </a:rPr>
-              <a:t>Animation et modération des communautés ; création et diffusion de contenus engageants (posts, vidéos, stories).</a:t>
-            </a:r>
-          </a:p>
-          <a:p>
-            <a:pPr algn="l" lvl="1">
-              <a:spcAft>
-                <a:spcPts val="100"/>
-              </a:spcAft>
-            </a:pPr>
-            <a:r>
-              <a:rPr sz="1200" b="1" i="0">
-                <a:solidFill>
-                  <a:srgbClr val="3AEDE5"/>
-                </a:solidFill>
-                <a:latin typeface="Alegreya Sans"/>
-              </a:rPr>
-              <a:t>•  </a:t>
-            </a:r>
-            <a:r>
-              <a:rPr sz="1200" b="0" i="0">
-                <a:solidFill>
-                  <a:srgbClr val="FFFFFF"/>
-                </a:solidFill>
-                <a:latin typeface="Alegreya Sans"/>
-              </a:rPr>
-              <a:t>Gestion de la e-réputation et de la relation client en ligne ; reporting des actions social media.</a:t>
-            </a:r>
-          </a:p>
-          <a:p>
-            <a:pPr algn="l">
-              <a:spcAft>
-                <a:spcPts val="100"/>
-              </a:spcAft>
-            </a:pPr>
-            <a:r>
-              <a:rPr sz="1200" b="1" i="0">
-                <a:solidFill>
-                  <a:srgbClr val="3AEDE5"/>
-                </a:solidFill>
-                <a:latin typeface="Alegreya Sans"/>
-              </a:rPr>
-              <a:t>▸ </a:t>
-            </a:r>
-            <a:r>
-              <a:rPr sz="1200" b="1" i="0">
-                <a:solidFill>
-                  <a:srgbClr val="FFFFFF"/>
-                </a:solidFill>
-                <a:latin typeface="Alegreya Sans"/>
-              </a:rPr>
-              <a:t>Technema</a:t>
-            </a:r>
-            <a:r>
-              <a:rPr sz="1200" b="0" i="0">
-                <a:solidFill>
-                  <a:srgbClr val="FFFFFF"/>
-                </a:solidFill>
-                <a:latin typeface="Alegreya Sans"/>
-              </a:rPr>
-              <a:t> — Marketing &amp; Communication interne/externe — alternance</a:t>
-            </a:r>
-            <a:r>
-              <a:rPr sz="1200" b="0" i="1">
-                <a:solidFill>
-                  <a:srgbClr val="3AEDE5"/>
-                </a:solidFill>
-                <a:latin typeface="Alegreya Sans"/>
-              </a:rPr>
-              <a:t>  (2024 — 2025)</a:t>
-            </a:r>
-          </a:p>
-          <a:p>
-            <a:pPr algn="l" lvl="1">
-              <a:spcAft>
-                <a:spcPts val="100"/>
-              </a:spcAft>
-            </a:pPr>
-            <a:r>
-              <a:rPr sz="1200" b="1" i="0">
-                <a:solidFill>
-                  <a:srgbClr val="3AEDE5"/>
-                </a:solidFill>
-                <a:latin typeface="Alegreya Sans"/>
-              </a:rPr>
-              <a:t>•  </a:t>
-            </a:r>
-            <a:r>
-              <a:rPr sz="1200" b="0" i="0">
-                <a:solidFill>
-                  <a:srgbClr val="FFFFFF"/>
-                </a:solidFill>
-                <a:latin typeface="Alegreya Sans"/>
-              </a:rPr>
-              <a:t>Réactualisation en équipe de la base de données fiche client ; refonte des codes articles et familles dans l'ERP.</a:t>
-            </a:r>
-          </a:p>
-          <a:p>
-            <a:pPr algn="l" lvl="1">
-              <a:spcAft>
-                <a:spcPts val="100"/>
-              </a:spcAft>
-            </a:pPr>
-            <a:r>
-              <a:rPr sz="1200" b="1" i="0">
-                <a:solidFill>
-                  <a:srgbClr val="3AEDE5"/>
-                </a:solidFill>
-                <a:latin typeface="Alegreya Sans"/>
-              </a:rPr>
-              <a:t>•  </a:t>
-            </a:r>
-            <a:r>
-              <a:rPr sz="1200" b="0" i="0">
-                <a:solidFill>
-                  <a:srgbClr val="FFFFFF"/>
-                </a:solidFill>
-                <a:latin typeface="Alegreya Sans"/>
-              </a:rPr>
-              <a:t>Plans de communication sur les thématiques produits (module CO2, coffre en ligne, services d'infogérance).</a:t>
-            </a:r>
-          </a:p>
-          <a:p>
-            <a:pPr algn="l">
-              <a:spcAft>
-                <a:spcPts val="100"/>
-              </a:spcAft>
-            </a:pPr>
-            <a:r>
-              <a:rPr sz="1200" b="1" i="0">
-                <a:solidFill>
-                  <a:srgbClr val="3AEDE5"/>
-                </a:solidFill>
-                <a:latin typeface="Alegreya Sans"/>
-              </a:rPr>
-              <a:t>▸ </a:t>
-            </a:r>
-            <a:r>
-              <a:rPr sz="1200" b="1" i="0">
-                <a:solidFill>
-                  <a:srgbClr val="FFFFFF"/>
-                </a:solidFill>
-                <a:latin typeface="Alegreya Sans"/>
-              </a:rPr>
-              <a:t>Rêver d'Ailleurs</a:t>
-            </a:r>
-            <a:r>
-              <a:rPr sz="1200" b="0" i="0">
-                <a:solidFill>
-                  <a:srgbClr val="FFFFFF"/>
-                </a:solidFill>
-                <a:latin typeface="Alegreya Sans"/>
-              </a:rPr>
-              <a:t> — Stage Communication — Événementiel</a:t>
-            </a:r>
-            <a:r>
-              <a:rPr sz="1200" b="0" i="1">
-                <a:solidFill>
-                  <a:srgbClr val="3AEDE5"/>
-                </a:solidFill>
-                <a:latin typeface="Alegreya Sans"/>
-              </a:rPr>
-              <a:t>  (2024 — 4 mois)</a:t>
-            </a:r>
-          </a:p>
-          <a:p>
-            <a:pPr algn="l" lvl="1">
-              <a:spcAft>
-                <a:spcPts val="100"/>
-              </a:spcAft>
-            </a:pPr>
-            <a:r>
-              <a:rPr sz="1200" b="1" i="0">
-                <a:solidFill>
-                  <a:srgbClr val="3AEDE5"/>
-                </a:solidFill>
-                <a:latin typeface="Alegreya Sans"/>
-              </a:rPr>
-              <a:t>•  </a:t>
-            </a:r>
-            <a:r>
-              <a:rPr sz="1200" b="0" i="0">
-                <a:solidFill>
-                  <a:srgbClr val="FFFFFF"/>
-                </a:solidFill>
-                <a:latin typeface="Alegreya Sans"/>
-              </a:rPr>
-              <a:t>Rédaction, planification, organisation et animation d'événements ; création de visuels et de contenus.</a:t>
-            </a:r>
-          </a:p>
-          <a:p>
-            <a:pPr algn="l">
-              <a:spcAft>
-                <a:spcPts val="100"/>
-              </a:spcAft>
-            </a:pPr>
-            <a:r>
-              <a:rPr sz="1200" b="1" i="0">
-                <a:solidFill>
-                  <a:srgbClr val="3AEDE5"/>
-                </a:solidFill>
-                <a:latin typeface="Alegreya Sans"/>
-              </a:rPr>
-              <a:t>▸ </a:t>
-            </a:r>
-            <a:r>
-              <a:rPr sz="1200" b="1" i="0">
-                <a:solidFill>
-                  <a:srgbClr val="FFFFFF"/>
-                </a:solidFill>
-                <a:latin typeface="Alegreya Sans"/>
-              </a:rPr>
-              <a:t>Athlon</a:t>
-            </a:r>
-            <a:r>
-              <a:rPr sz="1200" b="0" i="0">
-                <a:solidFill>
-                  <a:srgbClr val="FFFFFF"/>
-                </a:solidFill>
-                <a:latin typeface="Alegreya Sans"/>
-              </a:rPr>
-              <a:t> — Stage Communication interne</a:t>
-            </a:r>
-            <a:r>
-              <a:rPr sz="1200" b="0" i="1">
-                <a:solidFill>
-                  <a:srgbClr val="3AEDE5"/>
-                </a:solidFill>
-                <a:latin typeface="Alegreya Sans"/>
-              </a:rPr>
-              <a:t>  (2023 — 4 mois)</a:t>
-            </a:r>
-          </a:p>
-          <a:p>
-            <a:pPr algn="l" lvl="1">
-              <a:spcAft>
-                <a:spcPts val="100"/>
-              </a:spcAft>
-            </a:pPr>
-            <a:r>
-              <a:rPr sz="1200" b="1" i="0">
-                <a:solidFill>
-                  <a:srgbClr val="3AEDE5"/>
-                </a:solidFill>
-                <a:latin typeface="Alegreya Sans"/>
-              </a:rPr>
-              <a:t>•  </a:t>
-            </a:r>
-            <a:r>
-              <a:rPr sz="1200" b="0" i="0">
-                <a:solidFill>
-                  <a:srgbClr val="FFFFFF"/>
-                </a:solidFill>
-                <a:latin typeface="Alegreya Sans"/>
-              </a:rPr>
-              <a:t>Rédaction du livret d'accueil de l'entreprise ; création de visuels et vidéos.</a:t>
-            </a:r>
-          </a:p>
-          <a:p>
-            <a:pPr algn="l" lvl="1">
-              <a:spcAft>
-                <a:spcPts val="100"/>
-              </a:spcAft>
-            </a:pPr>
-            <a:r>
-              <a:rPr sz="1200" b="1" i="0">
-                <a:solidFill>
-                  <a:srgbClr val="3AEDE5"/>
-                </a:solidFill>
-                <a:latin typeface="Alegreya Sans"/>
-              </a:rPr>
-              <a:t>•  </a:t>
-            </a:r>
-            <a:r>
-              <a:rPr sz="1200" b="0" i="0">
-                <a:solidFill>
-                  <a:srgbClr val="FFFFFF"/>
-                </a:solidFill>
-                <a:latin typeface="Alegreya Sans"/>
-              </a:rPr>
-              <a:t>Recherches interne/externe sur des concepts modernes ; logique rédactionnelle entre thématiques.</a:t>
-            </a:r>
-          </a:p>
-        </p:txBody>
-      </p:sp>
       <p:sp>
         <p:nvSpPr>
           <p:cNvPr id="10" name="TextBox 9"/>
@@ -4319,61 +4308,6 @@
           <a:xfrm>
             <a:off x="0" y="0"/>
             <a:ext cx="12192000" cy="6858000"/>
-          </a:xfrm>
-          <a:prstGeom prst="rect">
-            <a:avLst/>
-          </a:prstGeom>
-          <a:ln>
-            <a:noFill/>
-          </a:ln>
-          <a:effectLst/>
-          <a:gradFill flip="none" rotWithShape="1">
-            <a:gsLst>
-              <a:gs pos="0">
-                <a:srgbClr val="07227A"/>
-              </a:gs>
-              <a:gs pos="85000">
-                <a:srgbClr val="07227A"/>
-              </a:gs>
-              <a:gs pos="100000">
-                <a:srgbClr val="1FCBD9"/>
-              </a:gs>
-            </a:gsLst>
-            <a:lin ang="2700000" scaled="0"/>
-          </a:gradFill>
-        </p:spPr>
-        <p:style>
-          <a:lnRef idx="1">
-            <a:schemeClr val="accent1"/>
-          </a:lnRef>
-          <a:fillRef idx="3">
-            <a:schemeClr val="accent1"/>
-          </a:fillRef>
-          <a:effectRef idx="2">
-            <a:schemeClr val="accent1"/>
-          </a:effectRef>
-          <a:fontRef idx="minor">
-            <a:schemeClr val="lt1"/>
-          </a:fontRef>
-        </p:style>
-        <p:txBody>
-          <a:bodyPr rtlCol="0" anchor="ctr"/>
-          <a:lstStyle/>
-          <a:p>
-            <a:pPr algn="ctr"/>
-          </a:p>
-        </p:txBody>
-      </p:sp>
-      <p:sp>
-        <p:nvSpPr>
-          <p:cNvPr id="3" name="Rectangle 2"/>
-          <p:cNvSpPr/>
-          <p:nvPr/>
-        </p:nvSpPr>
-        <p:spPr>
-          <a:xfrm>
-            <a:off x="0" y="0"/>
-            <a:ext cx="4300000" cy="6858000"/>
           </a:xfrm>
           <a:prstGeom prst="rect">
             <a:avLst/>
@@ -4410,7 +4344,1075 @@
       </p:sp>
       <p:sp>
         <p:nvSpPr>
-          <p:cNvPr id="4" name="Rectangle 3"/>
+          <p:cNvPr id="3" name="Rectangle 2"/>
+          <p:cNvSpPr/>
+          <p:nvPr/>
+        </p:nvSpPr>
+        <p:spPr>
+          <a:xfrm>
+            <a:off x="4300000" y="0"/>
+            <a:ext cx="15000" cy="6858000"/>
+          </a:xfrm>
+          <a:prstGeom prst="rect">
+            <a:avLst/>
+          </a:prstGeom>
+          <a:solidFill>
+            <a:srgbClr val="3AEDE5"/>
+          </a:solidFill>
+          <a:ln>
+            <a:noFill/>
+          </a:ln>
+          <a:effectLst/>
+        </p:spPr>
+        <p:style>
+          <a:lnRef idx="1">
+            <a:schemeClr val="accent1"/>
+          </a:lnRef>
+          <a:fillRef idx="3">
+            <a:schemeClr val="accent1"/>
+          </a:fillRef>
+          <a:effectRef idx="2">
+            <a:schemeClr val="accent1"/>
+          </a:effectRef>
+          <a:fontRef idx="minor">
+            <a:schemeClr val="lt1"/>
+          </a:fontRef>
+        </p:style>
+        <p:txBody>
+          <a:bodyPr rtlCol="0" anchor="ctr"/>
+          <a:lstStyle/>
+          <a:p>
+            <a:pPr algn="ctr"/>
+          </a:p>
+        </p:txBody>
+      </p:sp>
+      <p:pic>
+        <p:nvPicPr>
+          <p:cNvPr id="4" name="Picture 3" descr="inside_circle_logo.png"/>
+          <p:cNvPicPr>
+            <a:picLocks noChangeAspect="1"/>
+          </p:cNvPicPr>
+          <p:nvPr/>
+        </p:nvPicPr>
+        <p:blipFill>
+          <a:blip r:embed="rId2"/>
+          <a:stretch>
+            <a:fillRect/>
+          </a:stretch>
+        </p:blipFill>
+        <p:spPr>
+          <a:xfrm>
+            <a:off x="10660000" y="130000"/>
+            <a:ext cx="1302000" cy="420000"/>
+          </a:xfrm>
+          <a:prstGeom prst="rect">
+            <a:avLst/>
+          </a:prstGeom>
+        </p:spPr>
+      </p:pic>
+      <p:sp>
+        <p:nvSpPr>
+          <p:cNvPr id="5" name="TextBox 4"/>
+          <p:cNvSpPr txBox="1"/>
+          <p:nvPr/>
+        </p:nvSpPr>
+        <p:spPr>
+          <a:xfrm>
+            <a:off x="228600" y="260000"/>
+            <a:ext cx="3842800" cy="800000"/>
+          </a:xfrm>
+          <a:prstGeom prst="rect">
+            <a:avLst/>
+          </a:prstGeom>
+          <a:noFill/>
+        </p:spPr>
+        <p:txBody>
+          <a:bodyPr wrap="square" lIns="0" rIns="0" tIns="0" bIns="0">
+            <a:spAutoFit/>
+          </a:bodyPr>
+          <a:lstStyle/>
+          <a:p>
+            <a:pPr algn="l"/>
+            <a:r>
+              <a:rPr sz="4800" b="1" i="0">
+                <a:solidFill>
+                  <a:srgbClr val="3AEDE5"/>
+                </a:solidFill>
+                <a:latin typeface="Alegreya Sans"/>
+              </a:rPr>
+              <a:t>C.C.</a:t>
+            </a:r>
+          </a:p>
+        </p:txBody>
+      </p:sp>
+      <p:sp>
+        <p:nvSpPr>
+          <p:cNvPr id="6" name="TextBox 5"/>
+          <p:cNvSpPr txBox="1"/>
+          <p:nvPr/>
+        </p:nvSpPr>
+        <p:spPr>
+          <a:xfrm>
+            <a:off x="4528600" y="300000"/>
+            <a:ext cx="5963400" cy="800000"/>
+          </a:xfrm>
+          <a:prstGeom prst="rect">
+            <a:avLst/>
+          </a:prstGeom>
+          <a:noFill/>
+        </p:spPr>
+        <p:txBody>
+          <a:bodyPr wrap="square" lIns="0" rIns="0" tIns="0" bIns="0">
+            <a:spAutoFit/>
+          </a:bodyPr>
+          <a:lstStyle/>
+          <a:p>
+            <a:r>
+              <a:rPr sz="2400" b="1" i="0">
+                <a:solidFill>
+                  <a:srgbClr val="FFFFFF"/>
+                </a:solidFill>
+                <a:latin typeface="Alegreya Sans"/>
+              </a:rPr>
+              <a:t>Communication &amp; Marketing Officer</a:t>
+            </a:r>
+          </a:p>
+          <a:p>
+            <a:pPr>
+              <a:spcBef>
+                <a:spcPts val="200"/>
+              </a:spcBef>
+            </a:pPr>
+            <a:r>
+              <a:rPr sz="1500" b="0" i="1">
+                <a:solidFill>
+                  <a:srgbClr val="3AEDE5"/>
+                </a:solidFill>
+                <a:latin typeface="Alegreya Sans"/>
+              </a:rPr>
+              <a:t>Communication &amp; Marketing — Work-study Sept. 2026</a:t>
+            </a:r>
+          </a:p>
+        </p:txBody>
+      </p:sp>
+      <p:sp>
+        <p:nvSpPr>
+          <p:cNvPr id="7" name="TextBox 6"/>
+          <p:cNvSpPr txBox="1"/>
+          <p:nvPr/>
+        </p:nvSpPr>
+        <p:spPr>
+          <a:xfrm>
+            <a:off x="228600" y="1180000"/>
+            <a:ext cx="3842800" cy="5318000"/>
+          </a:xfrm>
+          <a:prstGeom prst="rect">
+            <a:avLst/>
+          </a:prstGeom>
+          <a:noFill/>
+        </p:spPr>
+        <p:txBody>
+          <a:bodyPr wrap="square" lIns="0" rIns="0" tIns="0" bIns="0">
+            <a:spAutoFit/>
+          </a:bodyPr>
+          <a:lstStyle/>
+          <a:p>
+            <a:pPr algn="l">
+              <a:spcAft>
+                <a:spcPts val="300"/>
+              </a:spcAft>
+            </a:pPr>
+            <a:r>
+              <a:rPr sz="1300" b="1" i="0">
+                <a:solidFill>
+                  <a:srgbClr val="3AEDE5"/>
+                </a:solidFill>
+                <a:latin typeface="Alegreya Sans"/>
+              </a:rPr>
+              <a:t>MAIN AREAS OF EXPERTISE</a:t>
+            </a:r>
+          </a:p>
+          <a:p>
+            <a:pPr algn="l">
+              <a:spcAft>
+                <a:spcPts val="100"/>
+              </a:spcAft>
+            </a:pPr>
+            <a:r>
+              <a:rPr sz="1200" b="1" i="0">
+                <a:solidFill>
+                  <a:srgbClr val="3AEDE5"/>
+                </a:solidFill>
+                <a:latin typeface="Alegreya Sans"/>
+              </a:rPr>
+              <a:t>•  </a:t>
+            </a:r>
+            <a:r>
+              <a:rPr sz="1200" b="0" i="0">
+                <a:solidFill>
+                  <a:srgbClr val="FFFFFF"/>
+                </a:solidFill>
+                <a:latin typeface="Alegreya Sans"/>
+              </a:rPr>
+              <a:t>Communication strategy</a:t>
+            </a:r>
+          </a:p>
+          <a:p>
+            <a:pPr algn="l">
+              <a:spcAft>
+                <a:spcPts val="100"/>
+              </a:spcAft>
+            </a:pPr>
+            <a:r>
+              <a:rPr sz="1200" b="1" i="0">
+                <a:solidFill>
+                  <a:srgbClr val="3AEDE5"/>
+                </a:solidFill>
+                <a:latin typeface="Alegreya Sans"/>
+              </a:rPr>
+              <a:t>•  </a:t>
+            </a:r>
+            <a:r>
+              <a:rPr sz="1200" b="0" i="0">
+                <a:solidFill>
+                  <a:srgbClr val="FFFFFF"/>
+                </a:solidFill>
+                <a:latin typeface="Alegreya Sans"/>
+              </a:rPr>
+              <a:t>Project organisation &amp; management</a:t>
+            </a:r>
+          </a:p>
+          <a:p>
+            <a:pPr algn="l">
+              <a:spcAft>
+                <a:spcPts val="100"/>
+              </a:spcAft>
+            </a:pPr>
+            <a:r>
+              <a:rPr sz="1200" b="1" i="0">
+                <a:solidFill>
+                  <a:srgbClr val="3AEDE5"/>
+                </a:solidFill>
+                <a:latin typeface="Alegreya Sans"/>
+              </a:rPr>
+              <a:t>•  </a:t>
+            </a:r>
+            <a:r>
+              <a:rPr sz="1200" b="0" i="0">
+                <a:solidFill>
+                  <a:srgbClr val="FFFFFF"/>
+                </a:solidFill>
+                <a:latin typeface="Alegreya Sans"/>
+              </a:rPr>
+              <a:t>Social media</a:t>
+            </a:r>
+          </a:p>
+          <a:p>
+            <a:pPr algn="l">
+              <a:spcAft>
+                <a:spcPts val="100"/>
+              </a:spcAft>
+            </a:pPr>
+            <a:r>
+              <a:rPr sz="1200" b="1" i="0">
+                <a:solidFill>
+                  <a:srgbClr val="3AEDE5"/>
+                </a:solidFill>
+                <a:latin typeface="Alegreya Sans"/>
+              </a:rPr>
+              <a:t>•  </a:t>
+            </a:r>
+            <a:r>
+              <a:rPr sz="1200" b="0" i="0">
+                <a:solidFill>
+                  <a:srgbClr val="FFFFFF"/>
+                </a:solidFill>
+                <a:latin typeface="Alegreya Sans"/>
+              </a:rPr>
+              <a:t>Video creation &amp; editing</a:t>
+            </a:r>
+          </a:p>
+          <a:p>
+            <a:pPr algn="l">
+              <a:spcAft>
+                <a:spcPts val="100"/>
+              </a:spcAft>
+            </a:pPr>
+            <a:r>
+              <a:rPr sz="1200" b="1" i="0">
+                <a:solidFill>
+                  <a:srgbClr val="3AEDE5"/>
+                </a:solidFill>
+                <a:latin typeface="Alegreya Sans"/>
+              </a:rPr>
+              <a:t>•  </a:t>
+            </a:r>
+            <a:r>
+              <a:rPr sz="1200" b="0" i="0">
+                <a:solidFill>
+                  <a:srgbClr val="FFFFFF"/>
+                </a:solidFill>
+                <a:latin typeface="Alegreya Sans"/>
+              </a:rPr>
+              <a:t>Team coordination</a:t>
+            </a:r>
+          </a:p>
+          <a:p>
+            <a:pPr algn="l">
+              <a:spcBef>
+                <a:spcPts val="600"/>
+              </a:spcBef>
+              <a:spcAft>
+                <a:spcPts val="300"/>
+              </a:spcAft>
+            </a:pPr>
+            <a:r>
+              <a:rPr sz="1300" b="1" i="0">
+                <a:solidFill>
+                  <a:srgbClr val="3AEDE5"/>
+                </a:solidFill>
+                <a:latin typeface="Alegreya Sans"/>
+              </a:rPr>
+              <a:t>LANGUAGES</a:t>
+            </a:r>
+          </a:p>
+          <a:p>
+            <a:pPr algn="l">
+              <a:spcAft>
+                <a:spcPts val="100"/>
+              </a:spcAft>
+            </a:pPr>
+            <a:r>
+              <a:rPr sz="1200" b="1" i="0">
+                <a:solidFill>
+                  <a:srgbClr val="3AEDE5"/>
+                </a:solidFill>
+                <a:latin typeface="Alegreya Sans"/>
+              </a:rPr>
+              <a:t>•  </a:t>
+            </a:r>
+            <a:r>
+              <a:rPr sz="1200" b="0" i="0">
+                <a:solidFill>
+                  <a:srgbClr val="FFFFFF"/>
+                </a:solidFill>
+                <a:latin typeface="Alegreya Sans"/>
+              </a:rPr>
+              <a:t>French — Native</a:t>
+            </a:r>
+          </a:p>
+          <a:p>
+            <a:pPr algn="l">
+              <a:spcAft>
+                <a:spcPts val="100"/>
+              </a:spcAft>
+            </a:pPr>
+            <a:r>
+              <a:rPr sz="1200" b="1" i="0">
+                <a:solidFill>
+                  <a:srgbClr val="3AEDE5"/>
+                </a:solidFill>
+                <a:latin typeface="Alegreya Sans"/>
+              </a:rPr>
+              <a:t>•  </a:t>
+            </a:r>
+            <a:r>
+              <a:rPr sz="1200" b="0" i="0">
+                <a:solidFill>
+                  <a:srgbClr val="FFFFFF"/>
+                </a:solidFill>
+                <a:latin typeface="Alegreya Sans"/>
+              </a:rPr>
+              <a:t>English — Intermediate</a:t>
+            </a:r>
+          </a:p>
+          <a:p>
+            <a:pPr algn="l">
+              <a:spcBef>
+                <a:spcPts val="600"/>
+              </a:spcBef>
+              <a:spcAft>
+                <a:spcPts val="300"/>
+              </a:spcAft>
+            </a:pPr>
+            <a:r>
+              <a:rPr sz="1300" b="1" i="0">
+                <a:solidFill>
+                  <a:srgbClr val="3AEDE5"/>
+                </a:solidFill>
+                <a:latin typeface="Alegreya Sans"/>
+              </a:rPr>
+              <a:t>EDUCATION &amp; CERTIFICATIONS</a:t>
+            </a:r>
+          </a:p>
+          <a:p>
+            <a:pPr algn="l">
+              <a:spcAft>
+                <a:spcPts val="100"/>
+              </a:spcAft>
+            </a:pPr>
+            <a:r>
+              <a:rPr sz="1200" b="1" i="0">
+                <a:solidFill>
+                  <a:srgbClr val="3AEDE5"/>
+                </a:solidFill>
+                <a:latin typeface="Alegreya Sans"/>
+              </a:rPr>
+              <a:t>2025  </a:t>
+            </a:r>
+            <a:r>
+              <a:rPr sz="1200" b="1" i="0">
+                <a:solidFill>
+                  <a:srgbClr val="FFFFFF"/>
+                </a:solidFill>
+                <a:latin typeface="Alegreya Sans"/>
+              </a:rPr>
+              <a:t>INSEEC (Paris 15e)</a:t>
+            </a:r>
+          </a:p>
+          <a:p>
+            <a:pPr algn="l">
+              <a:spcAft>
+                <a:spcPts val="300"/>
+              </a:spcAft>
+            </a:pPr>
+            <a:r>
+              <a:rPr sz="1200" b="0" i="1">
+                <a:solidFill>
+                  <a:srgbClr val="CCD6E8"/>
+                </a:solidFill>
+                <a:latin typeface="Alegreya Sans"/>
+              </a:rPr>
+              <a:t>M1 Marketing &amp; Communication</a:t>
+            </a:r>
+          </a:p>
+          <a:p>
+            <a:pPr algn="l">
+              <a:spcAft>
+                <a:spcPts val="100"/>
+              </a:spcAft>
+            </a:pPr>
+            <a:r>
+              <a:rPr sz="1200" b="1" i="0">
+                <a:solidFill>
+                  <a:srgbClr val="3AEDE5"/>
+                </a:solidFill>
+                <a:latin typeface="Alegreya Sans"/>
+              </a:rPr>
+              <a:t>2023 — 2025  </a:t>
+            </a:r>
+            <a:r>
+              <a:rPr sz="1200" b="1" i="0">
+                <a:solidFill>
+                  <a:srgbClr val="FFFFFF"/>
+                </a:solidFill>
+                <a:latin typeface="Alegreya Sans"/>
+              </a:rPr>
+              <a:t>ESGCI (Paris 11e)</a:t>
+            </a:r>
+          </a:p>
+          <a:p>
+            <a:pPr algn="l">
+              <a:spcAft>
+                <a:spcPts val="300"/>
+              </a:spcAft>
+            </a:pPr>
+            <a:r>
+              <a:rPr sz="1200" b="0" i="1">
+                <a:solidFill>
+                  <a:srgbClr val="CCD6E8"/>
+                </a:solidFill>
+                <a:latin typeface="Alegreya Sans"/>
+              </a:rPr>
+              <a:t>Bachelor 3 Event Com &amp; Digital Marketing</a:t>
+            </a:r>
+          </a:p>
+          <a:p>
+            <a:pPr algn="l">
+              <a:spcAft>
+                <a:spcPts val="100"/>
+              </a:spcAft>
+            </a:pPr>
+            <a:r>
+              <a:rPr sz="1200" b="1" i="0">
+                <a:solidFill>
+                  <a:srgbClr val="3AEDE5"/>
+                </a:solidFill>
+                <a:latin typeface="Alegreya Sans"/>
+              </a:rPr>
+              <a:t>2022 — 2023  </a:t>
+            </a:r>
+            <a:r>
+              <a:rPr sz="1200" b="1" i="0">
+                <a:solidFill>
+                  <a:srgbClr val="FFFFFF"/>
+                </a:solidFill>
+                <a:latin typeface="Alegreya Sans"/>
+              </a:rPr>
+              <a:t>UPEC (Créteil)</a:t>
+            </a:r>
+          </a:p>
+          <a:p>
+            <a:pPr algn="l">
+              <a:spcAft>
+                <a:spcPts val="300"/>
+              </a:spcAft>
+            </a:pPr>
+            <a:r>
+              <a:rPr sz="1200" b="0" i="1">
+                <a:solidFill>
+                  <a:srgbClr val="CCD6E8"/>
+                </a:solidFill>
+                <a:latin typeface="Alegreya Sans"/>
+              </a:rPr>
+              <a:t>DEUST 1 Office &amp; Multimedia Com</a:t>
+            </a:r>
+          </a:p>
+          <a:p>
+            <a:pPr algn="l">
+              <a:spcBef>
+                <a:spcPts val="600"/>
+              </a:spcBef>
+              <a:spcAft>
+                <a:spcPts val="300"/>
+              </a:spcAft>
+            </a:pPr>
+            <a:r>
+              <a:rPr sz="1300" b="1" i="0">
+                <a:solidFill>
+                  <a:srgbClr val="3AEDE5"/>
+                </a:solidFill>
+                <a:latin typeface="Alegreya Sans"/>
+              </a:rPr>
+              <a:t>INTERESTS</a:t>
+            </a:r>
+          </a:p>
+          <a:p>
+            <a:pPr algn="l">
+              <a:spcAft>
+                <a:spcPts val="100"/>
+              </a:spcAft>
+            </a:pPr>
+            <a:r>
+              <a:rPr sz="1200" b="1" i="0">
+                <a:solidFill>
+                  <a:srgbClr val="3AEDE5"/>
+                </a:solidFill>
+                <a:latin typeface="Alegreya Sans"/>
+              </a:rPr>
+              <a:t>•  </a:t>
+            </a:r>
+            <a:r>
+              <a:rPr sz="1200" b="0" i="0">
+                <a:solidFill>
+                  <a:srgbClr val="FFFFFF"/>
+                </a:solidFill>
+                <a:latin typeface="Alegreya Sans"/>
+              </a:rPr>
+              <a:t>Travel</a:t>
+            </a:r>
+          </a:p>
+          <a:p>
+            <a:pPr algn="l">
+              <a:spcAft>
+                <a:spcPts val="100"/>
+              </a:spcAft>
+            </a:pPr>
+            <a:r>
+              <a:rPr sz="1200" b="1" i="0">
+                <a:solidFill>
+                  <a:srgbClr val="3AEDE5"/>
+                </a:solidFill>
+                <a:latin typeface="Alegreya Sans"/>
+              </a:rPr>
+              <a:t>•  </a:t>
+            </a:r>
+            <a:r>
+              <a:rPr sz="1200" b="0" i="0">
+                <a:solidFill>
+                  <a:srgbClr val="FFFFFF"/>
+                </a:solidFill>
+                <a:latin typeface="Alegreya Sans"/>
+              </a:rPr>
+              <a:t>Art</a:t>
+            </a:r>
+          </a:p>
+          <a:p>
+            <a:pPr algn="l">
+              <a:spcAft>
+                <a:spcPts val="100"/>
+              </a:spcAft>
+            </a:pPr>
+            <a:r>
+              <a:rPr sz="1200" b="1" i="0">
+                <a:solidFill>
+                  <a:srgbClr val="3AEDE5"/>
+                </a:solidFill>
+                <a:latin typeface="Alegreya Sans"/>
+              </a:rPr>
+              <a:t>•  </a:t>
+            </a:r>
+            <a:r>
+              <a:rPr sz="1200" b="0" i="0">
+                <a:solidFill>
+                  <a:srgbClr val="FFFFFF"/>
+                </a:solidFill>
+                <a:latin typeface="Alegreya Sans"/>
+              </a:rPr>
+              <a:t>Reading</a:t>
+            </a:r>
+          </a:p>
+          <a:p>
+            <a:pPr algn="l">
+              <a:spcAft>
+                <a:spcPts val="100"/>
+              </a:spcAft>
+            </a:pPr>
+            <a:r>
+              <a:rPr sz="1200" b="1" i="0">
+                <a:solidFill>
+                  <a:srgbClr val="3AEDE5"/>
+                </a:solidFill>
+                <a:latin typeface="Alegreya Sans"/>
+              </a:rPr>
+              <a:t>•  </a:t>
+            </a:r>
+            <a:r>
+              <a:rPr sz="1200" b="0" i="0">
+                <a:solidFill>
+                  <a:srgbClr val="FFFFFF"/>
+                </a:solidFill>
+                <a:latin typeface="Alegreya Sans"/>
+              </a:rPr>
+              <a:t>Music</a:t>
+            </a:r>
+          </a:p>
+        </p:txBody>
+      </p:sp>
+      <p:sp>
+        <p:nvSpPr>
+          <p:cNvPr id="8" name="TextBox 7"/>
+          <p:cNvSpPr txBox="1"/>
+          <p:nvPr/>
+        </p:nvSpPr>
+        <p:spPr>
+          <a:xfrm>
+            <a:off x="4528600" y="1180000"/>
+            <a:ext cx="7434800" cy="5318000"/>
+          </a:xfrm>
+          <a:prstGeom prst="rect">
+            <a:avLst/>
+          </a:prstGeom>
+          <a:noFill/>
+        </p:spPr>
+        <p:txBody>
+          <a:bodyPr wrap="square" lIns="0" rIns="0" tIns="0" bIns="0">
+            <a:spAutoFit/>
+          </a:bodyPr>
+          <a:lstStyle/>
+          <a:p>
+            <a:pPr algn="l">
+              <a:spcAft>
+                <a:spcPts val="300"/>
+              </a:spcAft>
+            </a:pPr>
+            <a:r>
+              <a:rPr sz="1300" b="1" i="0">
+                <a:solidFill>
+                  <a:srgbClr val="3AEDE5"/>
+                </a:solidFill>
+                <a:latin typeface="Alegreya Sans"/>
+              </a:rPr>
+              <a:t>SUMMARY</a:t>
+            </a:r>
+          </a:p>
+          <a:p>
+            <a:pPr algn="l">
+              <a:spcAft>
+                <a:spcPts val="300"/>
+              </a:spcAft>
+            </a:pPr>
+            <a:r>
+              <a:rPr sz="1200" b="0" i="0">
+                <a:solidFill>
+                  <a:srgbClr val="FFFFFF"/>
+                </a:solidFill>
+                <a:latin typeface="Alegreya Sans"/>
+              </a:rPr>
+              <a:t>Curious, creative and analytical, I am finishing my Master's in Communication &amp; Marketing. My goal: join an ambitious team where I can turn ideas into concrete actions.</a:t>
+            </a:r>
+          </a:p>
+          <a:p>
+            <a:pPr algn="l">
+              <a:spcBef>
+                <a:spcPts val="600"/>
+              </a:spcBef>
+              <a:spcAft>
+                <a:spcPts val="300"/>
+              </a:spcAft>
+            </a:pPr>
+            <a:r>
+              <a:rPr sz="1300" b="1" i="0">
+                <a:solidFill>
+                  <a:srgbClr val="3AEDE5"/>
+                </a:solidFill>
+                <a:latin typeface="Alegreya Sans"/>
+              </a:rPr>
+              <a:t>PROFESSIONAL EXPERIENCE</a:t>
+            </a:r>
+          </a:p>
+          <a:p>
+            <a:pPr algn="l">
+              <a:spcAft>
+                <a:spcPts val="100"/>
+              </a:spcAft>
+            </a:pPr>
+            <a:r>
+              <a:rPr sz="1200" b="1" i="0">
+                <a:solidFill>
+                  <a:srgbClr val="3AEDE5"/>
+                </a:solidFill>
+                <a:latin typeface="Alegreya Sans"/>
+              </a:rPr>
+              <a:t>▸ </a:t>
+            </a:r>
+            <a:r>
+              <a:rPr sz="1200" b="1" i="0">
+                <a:solidFill>
+                  <a:srgbClr val="FFFFFF"/>
+                </a:solidFill>
+                <a:latin typeface="Alegreya Sans"/>
+              </a:rPr>
+              <a:t>Leroy Merlin</a:t>
+            </a:r>
+            <a:r>
+              <a:rPr sz="1200" b="0" i="0">
+                <a:solidFill>
+                  <a:srgbClr val="FFFFFF"/>
+                </a:solidFill>
+                <a:latin typeface="Alegreya Sans"/>
+              </a:rPr>
+              <a:t> — Community Manager — work-study</a:t>
+            </a:r>
+            <a:r>
+              <a:rPr sz="1200" b="0" i="1">
+                <a:solidFill>
+                  <a:srgbClr val="3AEDE5"/>
+                </a:solidFill>
+                <a:latin typeface="Alegreya Sans"/>
+              </a:rPr>
+              <a:t>  (Sept. 2025 — present)</a:t>
+            </a:r>
+          </a:p>
+          <a:p>
+            <a:pPr algn="l" lvl="1">
+              <a:spcAft>
+                <a:spcPts val="100"/>
+              </a:spcAft>
+            </a:pPr>
+            <a:r>
+              <a:rPr sz="1200" b="1" i="0">
+                <a:solidFill>
+                  <a:srgbClr val="3AEDE5"/>
+                </a:solidFill>
+                <a:latin typeface="Alegreya Sans"/>
+              </a:rPr>
+              <a:t>•  </a:t>
+            </a:r>
+            <a:r>
+              <a:rPr sz="1200" b="0" i="0">
+                <a:solidFill>
+                  <a:srgbClr val="FFFFFF"/>
+                </a:solidFill>
+                <a:latin typeface="Alegreya Sans"/>
+              </a:rPr>
+              <a:t>Community animation and moderation; creation and distribution of engaging content (posts, videos, stories).</a:t>
+            </a:r>
+          </a:p>
+          <a:p>
+            <a:pPr algn="l" lvl="1">
+              <a:spcAft>
+                <a:spcPts val="100"/>
+              </a:spcAft>
+            </a:pPr>
+            <a:r>
+              <a:rPr sz="1200" b="1" i="0">
+                <a:solidFill>
+                  <a:srgbClr val="3AEDE5"/>
+                </a:solidFill>
+                <a:latin typeface="Alegreya Sans"/>
+              </a:rPr>
+              <a:t>•  </a:t>
+            </a:r>
+            <a:r>
+              <a:rPr sz="1200" b="0" i="0">
+                <a:solidFill>
+                  <a:srgbClr val="FFFFFF"/>
+                </a:solidFill>
+                <a:latin typeface="Alegreya Sans"/>
+              </a:rPr>
+              <a:t>E-reputation and online customer relations management; social-media performance reporting.</a:t>
+            </a:r>
+          </a:p>
+          <a:p>
+            <a:pPr algn="l">
+              <a:spcAft>
+                <a:spcPts val="100"/>
+              </a:spcAft>
+            </a:pPr>
+            <a:r>
+              <a:rPr sz="1200" b="1" i="0">
+                <a:solidFill>
+                  <a:srgbClr val="3AEDE5"/>
+                </a:solidFill>
+                <a:latin typeface="Alegreya Sans"/>
+              </a:rPr>
+              <a:t>▸ </a:t>
+            </a:r>
+            <a:r>
+              <a:rPr sz="1200" b="1" i="0">
+                <a:solidFill>
+                  <a:srgbClr val="FFFFFF"/>
+                </a:solidFill>
+                <a:latin typeface="Alegreya Sans"/>
+              </a:rPr>
+              <a:t>Technema</a:t>
+            </a:r>
+            <a:r>
+              <a:rPr sz="1200" b="0" i="0">
+                <a:solidFill>
+                  <a:srgbClr val="FFFFFF"/>
+                </a:solidFill>
+                <a:latin typeface="Alegreya Sans"/>
+              </a:rPr>
+              <a:t> — Internal &amp; External Marketing — work-study</a:t>
+            </a:r>
+            <a:r>
+              <a:rPr sz="1200" b="0" i="1">
+                <a:solidFill>
+                  <a:srgbClr val="3AEDE5"/>
+                </a:solidFill>
+                <a:latin typeface="Alegreya Sans"/>
+              </a:rPr>
+              <a:t>  (2024 — 2025)</a:t>
+            </a:r>
+          </a:p>
+          <a:p>
+            <a:pPr algn="l" lvl="1">
+              <a:spcAft>
+                <a:spcPts val="100"/>
+              </a:spcAft>
+            </a:pPr>
+            <a:r>
+              <a:rPr sz="1200" b="1" i="0">
+                <a:solidFill>
+                  <a:srgbClr val="3AEDE5"/>
+                </a:solidFill>
+                <a:latin typeface="Alegreya Sans"/>
+              </a:rPr>
+              <a:t>•  </a:t>
+            </a:r>
+            <a:r>
+              <a:rPr sz="1200" b="0" i="0">
+                <a:solidFill>
+                  <a:srgbClr val="FFFFFF"/>
+                </a:solidFill>
+                <a:latin typeface="Alegreya Sans"/>
+              </a:rPr>
+              <a:t>Team refresh of the client master data; redesign of product and family codes in the ERP.</a:t>
+            </a:r>
+          </a:p>
+          <a:p>
+            <a:pPr algn="l" lvl="1">
+              <a:spcAft>
+                <a:spcPts val="100"/>
+              </a:spcAft>
+            </a:pPr>
+            <a:r>
+              <a:rPr sz="1200" b="1" i="0">
+                <a:solidFill>
+                  <a:srgbClr val="3AEDE5"/>
+                </a:solidFill>
+                <a:latin typeface="Alegreya Sans"/>
+              </a:rPr>
+              <a:t>•  </a:t>
+            </a:r>
+            <a:r>
+              <a:rPr sz="1200" b="0" i="0">
+                <a:solidFill>
+                  <a:srgbClr val="FFFFFF"/>
+                </a:solidFill>
+                <a:latin typeface="Alegreya Sans"/>
+              </a:rPr>
+              <a:t>Communication plans for product themes (CO2 module, online vault, IT-managed services).</a:t>
+            </a:r>
+          </a:p>
+          <a:p>
+            <a:pPr algn="l">
+              <a:spcAft>
+                <a:spcPts val="100"/>
+              </a:spcAft>
+            </a:pPr>
+            <a:r>
+              <a:rPr sz="1200" b="1" i="0">
+                <a:solidFill>
+                  <a:srgbClr val="3AEDE5"/>
+                </a:solidFill>
+                <a:latin typeface="Alegreya Sans"/>
+              </a:rPr>
+              <a:t>▸ </a:t>
+            </a:r>
+            <a:r>
+              <a:rPr sz="1200" b="1" i="0">
+                <a:solidFill>
+                  <a:srgbClr val="FFFFFF"/>
+                </a:solidFill>
+                <a:latin typeface="Alegreya Sans"/>
+              </a:rPr>
+              <a:t>Rêver d'Ailleurs</a:t>
+            </a:r>
+            <a:r>
+              <a:rPr sz="1200" b="0" i="0">
+                <a:solidFill>
+                  <a:srgbClr val="FFFFFF"/>
+                </a:solidFill>
+                <a:latin typeface="Alegreya Sans"/>
+              </a:rPr>
+              <a:t> — Communication intern — Events</a:t>
+            </a:r>
+            <a:r>
+              <a:rPr sz="1200" b="0" i="1">
+                <a:solidFill>
+                  <a:srgbClr val="3AEDE5"/>
+                </a:solidFill>
+                <a:latin typeface="Alegreya Sans"/>
+              </a:rPr>
+              <a:t>  (2024 — 4 months)</a:t>
+            </a:r>
+          </a:p>
+          <a:p>
+            <a:pPr algn="l" lvl="1">
+              <a:spcAft>
+                <a:spcPts val="100"/>
+              </a:spcAft>
+            </a:pPr>
+            <a:r>
+              <a:rPr sz="1200" b="1" i="0">
+                <a:solidFill>
+                  <a:srgbClr val="3AEDE5"/>
+                </a:solidFill>
+                <a:latin typeface="Alegreya Sans"/>
+              </a:rPr>
+              <a:t>•  </a:t>
+            </a:r>
+            <a:r>
+              <a:rPr sz="1200" b="0" i="0">
+                <a:solidFill>
+                  <a:srgbClr val="FFFFFF"/>
+                </a:solidFill>
+                <a:latin typeface="Alegreya Sans"/>
+              </a:rPr>
+              <a:t>Writing, planning, organising and hosting events; visual and content creation.</a:t>
+            </a:r>
+          </a:p>
+          <a:p>
+            <a:pPr algn="l">
+              <a:spcAft>
+                <a:spcPts val="100"/>
+              </a:spcAft>
+            </a:pPr>
+            <a:r>
+              <a:rPr sz="1200" b="1" i="0">
+                <a:solidFill>
+                  <a:srgbClr val="3AEDE5"/>
+                </a:solidFill>
+                <a:latin typeface="Alegreya Sans"/>
+              </a:rPr>
+              <a:t>▸ </a:t>
+            </a:r>
+            <a:r>
+              <a:rPr sz="1200" b="1" i="0">
+                <a:solidFill>
+                  <a:srgbClr val="FFFFFF"/>
+                </a:solidFill>
+                <a:latin typeface="Alegreya Sans"/>
+              </a:rPr>
+              <a:t>Athlon</a:t>
+            </a:r>
+            <a:r>
+              <a:rPr sz="1200" b="0" i="0">
+                <a:solidFill>
+                  <a:srgbClr val="FFFFFF"/>
+                </a:solidFill>
+                <a:latin typeface="Alegreya Sans"/>
+              </a:rPr>
+              <a:t> — Internal Communication intern</a:t>
+            </a:r>
+            <a:r>
+              <a:rPr sz="1200" b="0" i="1">
+                <a:solidFill>
+                  <a:srgbClr val="3AEDE5"/>
+                </a:solidFill>
+                <a:latin typeface="Alegreya Sans"/>
+              </a:rPr>
+              <a:t>  (2023 — 4 months)</a:t>
+            </a:r>
+          </a:p>
+          <a:p>
+            <a:pPr algn="l" lvl="1">
+              <a:spcAft>
+                <a:spcPts val="100"/>
+              </a:spcAft>
+            </a:pPr>
+            <a:r>
+              <a:rPr sz="1200" b="1" i="0">
+                <a:solidFill>
+                  <a:srgbClr val="3AEDE5"/>
+                </a:solidFill>
+                <a:latin typeface="Alegreya Sans"/>
+              </a:rPr>
+              <a:t>•  </a:t>
+            </a:r>
+            <a:r>
+              <a:rPr sz="1200" b="0" i="0">
+                <a:solidFill>
+                  <a:srgbClr val="FFFFFF"/>
+                </a:solidFill>
+                <a:latin typeface="Alegreya Sans"/>
+              </a:rPr>
+              <a:t>Drafted the company welcome booklet; created visuals and videos.</a:t>
+            </a:r>
+          </a:p>
+          <a:p>
+            <a:pPr algn="l" lvl="1">
+              <a:spcAft>
+                <a:spcPts val="100"/>
+              </a:spcAft>
+            </a:pPr>
+            <a:r>
+              <a:rPr sz="1200" b="1" i="0">
+                <a:solidFill>
+                  <a:srgbClr val="3AEDE5"/>
+                </a:solidFill>
+                <a:latin typeface="Alegreya Sans"/>
+              </a:rPr>
+              <a:t>•  </a:t>
+            </a:r>
+            <a:r>
+              <a:rPr sz="1200" b="0" i="0">
+                <a:solidFill>
+                  <a:srgbClr val="FFFFFF"/>
+                </a:solidFill>
+                <a:latin typeface="Alegreya Sans"/>
+              </a:rPr>
+              <a:t>Internal/external research on modern concepts; editorial logic across themes.</a:t>
+            </a:r>
+          </a:p>
+        </p:txBody>
+      </p:sp>
+      <p:sp>
+        <p:nvSpPr>
+          <p:cNvPr id="9" name="Rectangle 8"/>
           <p:cNvSpPr/>
           <p:nvPr/>
         </p:nvSpPr>
@@ -4449,1030 +5451,6 @@
           <a:lstStyle/>
           <a:p>
             <a:pPr algn="ctr"/>
-          </a:p>
-        </p:txBody>
-      </p:sp>
-      <p:pic>
-        <p:nvPicPr>
-          <p:cNvPr id="5" name="Picture 4" descr="inside_circle_logo.png"/>
-          <p:cNvPicPr>
-            <a:picLocks noChangeAspect="1"/>
-          </p:cNvPicPr>
-          <p:nvPr/>
-        </p:nvPicPr>
-        <p:blipFill>
-          <a:blip r:embed="rId2"/>
-          <a:stretch>
-            <a:fillRect/>
-          </a:stretch>
-        </p:blipFill>
-        <p:spPr>
-          <a:xfrm>
-            <a:off x="10660000" y="130000"/>
-            <a:ext cx="1302000" cy="420000"/>
-          </a:xfrm>
-          <a:prstGeom prst="rect">
-            <a:avLst/>
-          </a:prstGeom>
-        </p:spPr>
-      </p:pic>
-      <p:sp>
-        <p:nvSpPr>
-          <p:cNvPr id="6" name="TextBox 5"/>
-          <p:cNvSpPr txBox="1"/>
-          <p:nvPr/>
-        </p:nvSpPr>
-        <p:spPr>
-          <a:xfrm>
-            <a:off x="228600" y="260000"/>
-            <a:ext cx="3842800" cy="800000"/>
-          </a:xfrm>
-          <a:prstGeom prst="rect">
-            <a:avLst/>
-          </a:prstGeom>
-          <a:noFill/>
-        </p:spPr>
-        <p:txBody>
-          <a:bodyPr wrap="square" lIns="0" rIns="0" tIns="0" bIns="0">
-            <a:spAutoFit/>
-          </a:bodyPr>
-          <a:lstStyle/>
-          <a:p>
-            <a:pPr algn="l"/>
-            <a:r>
-              <a:rPr sz="4800" b="1" i="0">
-                <a:solidFill>
-                  <a:srgbClr val="3AEDE5"/>
-                </a:solidFill>
-                <a:latin typeface="Alegreya Sans"/>
-              </a:rPr>
-              <a:t>C.C.</a:t>
-            </a:r>
-          </a:p>
-        </p:txBody>
-      </p:sp>
-      <p:sp>
-        <p:nvSpPr>
-          <p:cNvPr id="7" name="TextBox 6"/>
-          <p:cNvSpPr txBox="1"/>
-          <p:nvPr/>
-        </p:nvSpPr>
-        <p:spPr>
-          <a:xfrm>
-            <a:off x="4528600" y="300000"/>
-            <a:ext cx="5963400" cy="800000"/>
-          </a:xfrm>
-          <a:prstGeom prst="rect">
-            <a:avLst/>
-          </a:prstGeom>
-          <a:noFill/>
-        </p:spPr>
-        <p:txBody>
-          <a:bodyPr wrap="square" lIns="0" rIns="0" tIns="0" bIns="0">
-            <a:spAutoFit/>
-          </a:bodyPr>
-          <a:lstStyle/>
-          <a:p>
-            <a:r>
-              <a:rPr sz="2400" b="1" i="0">
-                <a:solidFill>
-                  <a:srgbClr val="FFFFFF"/>
-                </a:solidFill>
-                <a:latin typeface="Alegreya Sans"/>
-              </a:rPr>
-              <a:t>Communication &amp; Marketing Officer</a:t>
-            </a:r>
-          </a:p>
-          <a:p>
-            <a:pPr>
-              <a:spcBef>
-                <a:spcPts val="200"/>
-              </a:spcBef>
-            </a:pPr>
-            <a:r>
-              <a:rPr sz="1500" b="0" i="1">
-                <a:solidFill>
-                  <a:srgbClr val="3AEDE5"/>
-                </a:solidFill>
-                <a:latin typeface="Alegreya Sans"/>
-              </a:rPr>
-              <a:t>Communication &amp; Marketing — Work-study Sept. 2026</a:t>
-            </a:r>
-          </a:p>
-        </p:txBody>
-      </p:sp>
-      <p:sp>
-        <p:nvSpPr>
-          <p:cNvPr id="8" name="TextBox 7"/>
-          <p:cNvSpPr txBox="1"/>
-          <p:nvPr/>
-        </p:nvSpPr>
-        <p:spPr>
-          <a:xfrm>
-            <a:off x="228600" y="1180000"/>
-            <a:ext cx="3842800" cy="5318000"/>
-          </a:xfrm>
-          <a:prstGeom prst="rect">
-            <a:avLst/>
-          </a:prstGeom>
-          <a:noFill/>
-        </p:spPr>
-        <p:txBody>
-          <a:bodyPr wrap="square" lIns="0" rIns="0" tIns="0" bIns="0">
-            <a:spAutoFit/>
-          </a:bodyPr>
-          <a:lstStyle/>
-          <a:p>
-            <a:pPr algn="l">
-              <a:spcAft>
-                <a:spcPts val="300"/>
-              </a:spcAft>
-            </a:pPr>
-            <a:r>
-              <a:rPr sz="1300" b="1" i="0">
-                <a:solidFill>
-                  <a:srgbClr val="3AEDE5"/>
-                </a:solidFill>
-                <a:latin typeface="Alegreya Sans"/>
-              </a:rPr>
-              <a:t>MAIN AREAS OF EXPERTISE</a:t>
-            </a:r>
-          </a:p>
-          <a:p>
-            <a:pPr algn="l">
-              <a:spcAft>
-                <a:spcPts val="100"/>
-              </a:spcAft>
-            </a:pPr>
-            <a:r>
-              <a:rPr sz="1200" b="1" i="0">
-                <a:solidFill>
-                  <a:srgbClr val="3AEDE5"/>
-                </a:solidFill>
-                <a:latin typeface="Alegreya Sans"/>
-              </a:rPr>
-              <a:t>•  </a:t>
-            </a:r>
-            <a:r>
-              <a:rPr sz="1200" b="0" i="0">
-                <a:solidFill>
-                  <a:srgbClr val="FFFFFF"/>
-                </a:solidFill>
-                <a:latin typeface="Alegreya Sans"/>
-              </a:rPr>
-              <a:t>Communication strategy</a:t>
-            </a:r>
-          </a:p>
-          <a:p>
-            <a:pPr algn="l">
-              <a:spcAft>
-                <a:spcPts val="100"/>
-              </a:spcAft>
-            </a:pPr>
-            <a:r>
-              <a:rPr sz="1200" b="1" i="0">
-                <a:solidFill>
-                  <a:srgbClr val="3AEDE5"/>
-                </a:solidFill>
-                <a:latin typeface="Alegreya Sans"/>
-              </a:rPr>
-              <a:t>•  </a:t>
-            </a:r>
-            <a:r>
-              <a:rPr sz="1200" b="0" i="0">
-                <a:solidFill>
-                  <a:srgbClr val="FFFFFF"/>
-                </a:solidFill>
-                <a:latin typeface="Alegreya Sans"/>
-              </a:rPr>
-              <a:t>Project organisation &amp; management</a:t>
-            </a:r>
-          </a:p>
-          <a:p>
-            <a:pPr algn="l">
-              <a:spcAft>
-                <a:spcPts val="100"/>
-              </a:spcAft>
-            </a:pPr>
-            <a:r>
-              <a:rPr sz="1200" b="1" i="0">
-                <a:solidFill>
-                  <a:srgbClr val="3AEDE5"/>
-                </a:solidFill>
-                <a:latin typeface="Alegreya Sans"/>
-              </a:rPr>
-              <a:t>•  </a:t>
-            </a:r>
-            <a:r>
-              <a:rPr sz="1200" b="0" i="0">
-                <a:solidFill>
-                  <a:srgbClr val="FFFFFF"/>
-                </a:solidFill>
-                <a:latin typeface="Alegreya Sans"/>
-              </a:rPr>
-              <a:t>Social media</a:t>
-            </a:r>
-          </a:p>
-          <a:p>
-            <a:pPr algn="l">
-              <a:spcAft>
-                <a:spcPts val="100"/>
-              </a:spcAft>
-            </a:pPr>
-            <a:r>
-              <a:rPr sz="1200" b="1" i="0">
-                <a:solidFill>
-                  <a:srgbClr val="3AEDE5"/>
-                </a:solidFill>
-                <a:latin typeface="Alegreya Sans"/>
-              </a:rPr>
-              <a:t>•  </a:t>
-            </a:r>
-            <a:r>
-              <a:rPr sz="1200" b="0" i="0">
-                <a:solidFill>
-                  <a:srgbClr val="FFFFFF"/>
-                </a:solidFill>
-                <a:latin typeface="Alegreya Sans"/>
-              </a:rPr>
-              <a:t>Video creation &amp; editing</a:t>
-            </a:r>
-          </a:p>
-          <a:p>
-            <a:pPr algn="l">
-              <a:spcAft>
-                <a:spcPts val="100"/>
-              </a:spcAft>
-            </a:pPr>
-            <a:r>
-              <a:rPr sz="1200" b="1" i="0">
-                <a:solidFill>
-                  <a:srgbClr val="3AEDE5"/>
-                </a:solidFill>
-                <a:latin typeface="Alegreya Sans"/>
-              </a:rPr>
-              <a:t>•  </a:t>
-            </a:r>
-            <a:r>
-              <a:rPr sz="1200" b="0" i="0">
-                <a:solidFill>
-                  <a:srgbClr val="FFFFFF"/>
-                </a:solidFill>
-                <a:latin typeface="Alegreya Sans"/>
-              </a:rPr>
-              <a:t>Team coordination</a:t>
-            </a:r>
-          </a:p>
-          <a:p>
-            <a:pPr algn="l">
-              <a:spcBef>
-                <a:spcPts val="600"/>
-              </a:spcBef>
-              <a:spcAft>
-                <a:spcPts val="300"/>
-              </a:spcAft>
-            </a:pPr>
-            <a:r>
-              <a:rPr sz="1300" b="1" i="0">
-                <a:solidFill>
-                  <a:srgbClr val="3AEDE5"/>
-                </a:solidFill>
-                <a:latin typeface="Alegreya Sans"/>
-              </a:rPr>
-              <a:t>LANGUAGES</a:t>
-            </a:r>
-          </a:p>
-          <a:p>
-            <a:pPr algn="l">
-              <a:spcAft>
-                <a:spcPts val="100"/>
-              </a:spcAft>
-            </a:pPr>
-            <a:r>
-              <a:rPr sz="1200" b="1" i="0">
-                <a:solidFill>
-                  <a:srgbClr val="3AEDE5"/>
-                </a:solidFill>
-                <a:latin typeface="Alegreya Sans"/>
-              </a:rPr>
-              <a:t>•  </a:t>
-            </a:r>
-            <a:r>
-              <a:rPr sz="1200" b="0" i="0">
-                <a:solidFill>
-                  <a:srgbClr val="FFFFFF"/>
-                </a:solidFill>
-                <a:latin typeface="Alegreya Sans"/>
-              </a:rPr>
-              <a:t>French — Native</a:t>
-            </a:r>
-          </a:p>
-          <a:p>
-            <a:pPr algn="l">
-              <a:spcAft>
-                <a:spcPts val="100"/>
-              </a:spcAft>
-            </a:pPr>
-            <a:r>
-              <a:rPr sz="1200" b="1" i="0">
-                <a:solidFill>
-                  <a:srgbClr val="3AEDE5"/>
-                </a:solidFill>
-                <a:latin typeface="Alegreya Sans"/>
-              </a:rPr>
-              <a:t>•  </a:t>
-            </a:r>
-            <a:r>
-              <a:rPr sz="1200" b="0" i="0">
-                <a:solidFill>
-                  <a:srgbClr val="FFFFFF"/>
-                </a:solidFill>
-                <a:latin typeface="Alegreya Sans"/>
-              </a:rPr>
-              <a:t>English — Intermediate</a:t>
-            </a:r>
-          </a:p>
-          <a:p>
-            <a:pPr algn="l">
-              <a:spcBef>
-                <a:spcPts val="600"/>
-              </a:spcBef>
-              <a:spcAft>
-                <a:spcPts val="300"/>
-              </a:spcAft>
-            </a:pPr>
-            <a:r>
-              <a:rPr sz="1300" b="1" i="0">
-                <a:solidFill>
-                  <a:srgbClr val="3AEDE5"/>
-                </a:solidFill>
-                <a:latin typeface="Alegreya Sans"/>
-              </a:rPr>
-              <a:t>EDUCATION &amp; CERTIFICATIONS</a:t>
-            </a:r>
-          </a:p>
-          <a:p>
-            <a:pPr algn="l">
-              <a:spcAft>
-                <a:spcPts val="100"/>
-              </a:spcAft>
-            </a:pPr>
-            <a:r>
-              <a:rPr sz="1200" b="1" i="0">
-                <a:solidFill>
-                  <a:srgbClr val="3AEDE5"/>
-                </a:solidFill>
-                <a:latin typeface="Alegreya Sans"/>
-              </a:rPr>
-              <a:t>2025  </a:t>
-            </a:r>
-            <a:r>
-              <a:rPr sz="1200" b="1" i="0">
-                <a:solidFill>
-                  <a:srgbClr val="FFFFFF"/>
-                </a:solidFill>
-                <a:latin typeface="Alegreya Sans"/>
-              </a:rPr>
-              <a:t>INSEEC (Paris 15e)</a:t>
-            </a:r>
-          </a:p>
-          <a:p>
-            <a:pPr algn="l">
-              <a:spcAft>
-                <a:spcPts val="300"/>
-              </a:spcAft>
-            </a:pPr>
-            <a:r>
-              <a:rPr sz="1200" b="0" i="1">
-                <a:solidFill>
-                  <a:srgbClr val="CCD6E8"/>
-                </a:solidFill>
-                <a:latin typeface="Alegreya Sans"/>
-              </a:rPr>
-              <a:t>M1 Marketing &amp; Communication</a:t>
-            </a:r>
-          </a:p>
-          <a:p>
-            <a:pPr algn="l">
-              <a:spcAft>
-                <a:spcPts val="100"/>
-              </a:spcAft>
-            </a:pPr>
-            <a:r>
-              <a:rPr sz="1200" b="1" i="0">
-                <a:solidFill>
-                  <a:srgbClr val="3AEDE5"/>
-                </a:solidFill>
-                <a:latin typeface="Alegreya Sans"/>
-              </a:rPr>
-              <a:t>2023 — 2025  </a:t>
-            </a:r>
-            <a:r>
-              <a:rPr sz="1200" b="1" i="0">
-                <a:solidFill>
-                  <a:srgbClr val="FFFFFF"/>
-                </a:solidFill>
-                <a:latin typeface="Alegreya Sans"/>
-              </a:rPr>
-              <a:t>ESGCI (Paris 11e)</a:t>
-            </a:r>
-          </a:p>
-          <a:p>
-            <a:pPr algn="l">
-              <a:spcAft>
-                <a:spcPts val="300"/>
-              </a:spcAft>
-            </a:pPr>
-            <a:r>
-              <a:rPr sz="1200" b="0" i="1">
-                <a:solidFill>
-                  <a:srgbClr val="CCD6E8"/>
-                </a:solidFill>
-                <a:latin typeface="Alegreya Sans"/>
-              </a:rPr>
-              <a:t>Bachelor 3 Event Com &amp; Digital Marketing</a:t>
-            </a:r>
-          </a:p>
-          <a:p>
-            <a:pPr algn="l">
-              <a:spcAft>
-                <a:spcPts val="100"/>
-              </a:spcAft>
-            </a:pPr>
-            <a:r>
-              <a:rPr sz="1200" b="1" i="0">
-                <a:solidFill>
-                  <a:srgbClr val="3AEDE5"/>
-                </a:solidFill>
-                <a:latin typeface="Alegreya Sans"/>
-              </a:rPr>
-              <a:t>2022 — 2023  </a:t>
-            </a:r>
-            <a:r>
-              <a:rPr sz="1200" b="1" i="0">
-                <a:solidFill>
-                  <a:srgbClr val="FFFFFF"/>
-                </a:solidFill>
-                <a:latin typeface="Alegreya Sans"/>
-              </a:rPr>
-              <a:t>UPEC (Créteil)</a:t>
-            </a:r>
-          </a:p>
-          <a:p>
-            <a:pPr algn="l">
-              <a:spcAft>
-                <a:spcPts val="300"/>
-              </a:spcAft>
-            </a:pPr>
-            <a:r>
-              <a:rPr sz="1200" b="0" i="1">
-                <a:solidFill>
-                  <a:srgbClr val="CCD6E8"/>
-                </a:solidFill>
-                <a:latin typeface="Alegreya Sans"/>
-              </a:rPr>
-              <a:t>DEUST 1 Office &amp; Multimedia Com</a:t>
-            </a:r>
-          </a:p>
-          <a:p>
-            <a:pPr algn="l">
-              <a:spcBef>
-                <a:spcPts val="600"/>
-              </a:spcBef>
-              <a:spcAft>
-                <a:spcPts val="300"/>
-              </a:spcAft>
-            </a:pPr>
-            <a:r>
-              <a:rPr sz="1300" b="1" i="0">
-                <a:solidFill>
-                  <a:srgbClr val="3AEDE5"/>
-                </a:solidFill>
-                <a:latin typeface="Alegreya Sans"/>
-              </a:rPr>
-              <a:t>INTERESTS</a:t>
-            </a:r>
-          </a:p>
-          <a:p>
-            <a:pPr algn="l">
-              <a:spcAft>
-                <a:spcPts val="100"/>
-              </a:spcAft>
-            </a:pPr>
-            <a:r>
-              <a:rPr sz="1200" b="1" i="0">
-                <a:solidFill>
-                  <a:srgbClr val="3AEDE5"/>
-                </a:solidFill>
-                <a:latin typeface="Alegreya Sans"/>
-              </a:rPr>
-              <a:t>•  </a:t>
-            </a:r>
-            <a:r>
-              <a:rPr sz="1200" b="0" i="0">
-                <a:solidFill>
-                  <a:srgbClr val="FFFFFF"/>
-                </a:solidFill>
-                <a:latin typeface="Alegreya Sans"/>
-              </a:rPr>
-              <a:t>Travel</a:t>
-            </a:r>
-          </a:p>
-          <a:p>
-            <a:pPr algn="l">
-              <a:spcAft>
-                <a:spcPts val="100"/>
-              </a:spcAft>
-            </a:pPr>
-            <a:r>
-              <a:rPr sz="1200" b="1" i="0">
-                <a:solidFill>
-                  <a:srgbClr val="3AEDE5"/>
-                </a:solidFill>
-                <a:latin typeface="Alegreya Sans"/>
-              </a:rPr>
-              <a:t>•  </a:t>
-            </a:r>
-            <a:r>
-              <a:rPr sz="1200" b="0" i="0">
-                <a:solidFill>
-                  <a:srgbClr val="FFFFFF"/>
-                </a:solidFill>
-                <a:latin typeface="Alegreya Sans"/>
-              </a:rPr>
-              <a:t>Art</a:t>
-            </a:r>
-          </a:p>
-          <a:p>
-            <a:pPr algn="l">
-              <a:spcAft>
-                <a:spcPts val="100"/>
-              </a:spcAft>
-            </a:pPr>
-            <a:r>
-              <a:rPr sz="1200" b="1" i="0">
-                <a:solidFill>
-                  <a:srgbClr val="3AEDE5"/>
-                </a:solidFill>
-                <a:latin typeface="Alegreya Sans"/>
-              </a:rPr>
-              <a:t>•  </a:t>
-            </a:r>
-            <a:r>
-              <a:rPr sz="1200" b="0" i="0">
-                <a:solidFill>
-                  <a:srgbClr val="FFFFFF"/>
-                </a:solidFill>
-                <a:latin typeface="Alegreya Sans"/>
-              </a:rPr>
-              <a:t>Reading</a:t>
-            </a:r>
-          </a:p>
-          <a:p>
-            <a:pPr algn="l">
-              <a:spcAft>
-                <a:spcPts val="100"/>
-              </a:spcAft>
-            </a:pPr>
-            <a:r>
-              <a:rPr sz="1200" b="1" i="0">
-                <a:solidFill>
-                  <a:srgbClr val="3AEDE5"/>
-                </a:solidFill>
-                <a:latin typeface="Alegreya Sans"/>
-              </a:rPr>
-              <a:t>•  </a:t>
-            </a:r>
-            <a:r>
-              <a:rPr sz="1200" b="0" i="0">
-                <a:solidFill>
-                  <a:srgbClr val="FFFFFF"/>
-                </a:solidFill>
-                <a:latin typeface="Alegreya Sans"/>
-              </a:rPr>
-              <a:t>Music</a:t>
-            </a:r>
-          </a:p>
-        </p:txBody>
-      </p:sp>
-      <p:sp>
-        <p:nvSpPr>
-          <p:cNvPr id="9" name="TextBox 8"/>
-          <p:cNvSpPr txBox="1"/>
-          <p:nvPr/>
-        </p:nvSpPr>
-        <p:spPr>
-          <a:xfrm>
-            <a:off x="4528600" y="1180000"/>
-            <a:ext cx="7434800" cy="5318000"/>
-          </a:xfrm>
-          <a:prstGeom prst="rect">
-            <a:avLst/>
-          </a:prstGeom>
-          <a:noFill/>
-        </p:spPr>
-        <p:txBody>
-          <a:bodyPr wrap="square" lIns="0" rIns="0" tIns="0" bIns="0">
-            <a:spAutoFit/>
-          </a:bodyPr>
-          <a:lstStyle/>
-          <a:p>
-            <a:pPr algn="l">
-              <a:spcAft>
-                <a:spcPts val="300"/>
-              </a:spcAft>
-            </a:pPr>
-            <a:r>
-              <a:rPr sz="1300" b="1" i="0">
-                <a:solidFill>
-                  <a:srgbClr val="3AEDE5"/>
-                </a:solidFill>
-                <a:latin typeface="Alegreya Sans"/>
-              </a:rPr>
-              <a:t>SUMMARY</a:t>
-            </a:r>
-          </a:p>
-          <a:p>
-            <a:pPr algn="l">
-              <a:spcAft>
-                <a:spcPts val="300"/>
-              </a:spcAft>
-            </a:pPr>
-            <a:r>
-              <a:rPr sz="1200" b="0" i="0">
-                <a:solidFill>
-                  <a:srgbClr val="FFFFFF"/>
-                </a:solidFill>
-                <a:latin typeface="Alegreya Sans"/>
-              </a:rPr>
-              <a:t>Curious, creative and analytical, I am finishing my Master's in Communication &amp; Marketing. My goal: join an ambitious team where I can turn ideas into concrete actions.</a:t>
-            </a:r>
-          </a:p>
-          <a:p>
-            <a:pPr algn="l">
-              <a:spcBef>
-                <a:spcPts val="600"/>
-              </a:spcBef>
-              <a:spcAft>
-                <a:spcPts val="300"/>
-              </a:spcAft>
-            </a:pPr>
-            <a:r>
-              <a:rPr sz="1300" b="1" i="0">
-                <a:solidFill>
-                  <a:srgbClr val="3AEDE5"/>
-                </a:solidFill>
-                <a:latin typeface="Alegreya Sans"/>
-              </a:rPr>
-              <a:t>PROFESSIONAL EXPERIENCE</a:t>
-            </a:r>
-          </a:p>
-          <a:p>
-            <a:pPr algn="l">
-              <a:spcAft>
-                <a:spcPts val="100"/>
-              </a:spcAft>
-            </a:pPr>
-            <a:r>
-              <a:rPr sz="1200" b="1" i="0">
-                <a:solidFill>
-                  <a:srgbClr val="3AEDE5"/>
-                </a:solidFill>
-                <a:latin typeface="Alegreya Sans"/>
-              </a:rPr>
-              <a:t>▸ </a:t>
-            </a:r>
-            <a:r>
-              <a:rPr sz="1200" b="1" i="0">
-                <a:solidFill>
-                  <a:srgbClr val="FFFFFF"/>
-                </a:solidFill>
-                <a:latin typeface="Alegreya Sans"/>
-              </a:rPr>
-              <a:t>Leroy Merlin</a:t>
-            </a:r>
-            <a:r>
-              <a:rPr sz="1200" b="0" i="0">
-                <a:solidFill>
-                  <a:srgbClr val="FFFFFF"/>
-                </a:solidFill>
-                <a:latin typeface="Alegreya Sans"/>
-              </a:rPr>
-              <a:t> — Community Manager — work-study</a:t>
-            </a:r>
-            <a:r>
-              <a:rPr sz="1200" b="0" i="1">
-                <a:solidFill>
-                  <a:srgbClr val="3AEDE5"/>
-                </a:solidFill>
-                <a:latin typeface="Alegreya Sans"/>
-              </a:rPr>
-              <a:t>  (Sept. 2025 — present)</a:t>
-            </a:r>
-          </a:p>
-          <a:p>
-            <a:pPr algn="l" lvl="1">
-              <a:spcAft>
-                <a:spcPts val="100"/>
-              </a:spcAft>
-            </a:pPr>
-            <a:r>
-              <a:rPr sz="1200" b="1" i="0">
-                <a:solidFill>
-                  <a:srgbClr val="3AEDE5"/>
-                </a:solidFill>
-                <a:latin typeface="Alegreya Sans"/>
-              </a:rPr>
-              <a:t>•  </a:t>
-            </a:r>
-            <a:r>
-              <a:rPr sz="1200" b="0" i="0">
-                <a:solidFill>
-                  <a:srgbClr val="FFFFFF"/>
-                </a:solidFill>
-                <a:latin typeface="Alegreya Sans"/>
-              </a:rPr>
-              <a:t>Community animation and moderation; creation and distribution of engaging content (posts, videos, stories).</a:t>
-            </a:r>
-          </a:p>
-          <a:p>
-            <a:pPr algn="l" lvl="1">
-              <a:spcAft>
-                <a:spcPts val="100"/>
-              </a:spcAft>
-            </a:pPr>
-            <a:r>
-              <a:rPr sz="1200" b="1" i="0">
-                <a:solidFill>
-                  <a:srgbClr val="3AEDE5"/>
-                </a:solidFill>
-                <a:latin typeface="Alegreya Sans"/>
-              </a:rPr>
-              <a:t>•  </a:t>
-            </a:r>
-            <a:r>
-              <a:rPr sz="1200" b="0" i="0">
-                <a:solidFill>
-                  <a:srgbClr val="FFFFFF"/>
-                </a:solidFill>
-                <a:latin typeface="Alegreya Sans"/>
-              </a:rPr>
-              <a:t>E-reputation and online customer relations management; social-media performance reporting.</a:t>
-            </a:r>
-          </a:p>
-          <a:p>
-            <a:pPr algn="l">
-              <a:spcAft>
-                <a:spcPts val="100"/>
-              </a:spcAft>
-            </a:pPr>
-            <a:r>
-              <a:rPr sz="1200" b="1" i="0">
-                <a:solidFill>
-                  <a:srgbClr val="3AEDE5"/>
-                </a:solidFill>
-                <a:latin typeface="Alegreya Sans"/>
-              </a:rPr>
-              <a:t>▸ </a:t>
-            </a:r>
-            <a:r>
-              <a:rPr sz="1200" b="1" i="0">
-                <a:solidFill>
-                  <a:srgbClr val="FFFFFF"/>
-                </a:solidFill>
-                <a:latin typeface="Alegreya Sans"/>
-              </a:rPr>
-              <a:t>Technema</a:t>
-            </a:r>
-            <a:r>
-              <a:rPr sz="1200" b="0" i="0">
-                <a:solidFill>
-                  <a:srgbClr val="FFFFFF"/>
-                </a:solidFill>
-                <a:latin typeface="Alegreya Sans"/>
-              </a:rPr>
-              <a:t> — Internal &amp; External Marketing — work-study</a:t>
-            </a:r>
-            <a:r>
-              <a:rPr sz="1200" b="0" i="1">
-                <a:solidFill>
-                  <a:srgbClr val="3AEDE5"/>
-                </a:solidFill>
-                <a:latin typeface="Alegreya Sans"/>
-              </a:rPr>
-              <a:t>  (2024 — 2025)</a:t>
-            </a:r>
-          </a:p>
-          <a:p>
-            <a:pPr algn="l" lvl="1">
-              <a:spcAft>
-                <a:spcPts val="100"/>
-              </a:spcAft>
-            </a:pPr>
-            <a:r>
-              <a:rPr sz="1200" b="1" i="0">
-                <a:solidFill>
-                  <a:srgbClr val="3AEDE5"/>
-                </a:solidFill>
-                <a:latin typeface="Alegreya Sans"/>
-              </a:rPr>
-              <a:t>•  </a:t>
-            </a:r>
-            <a:r>
-              <a:rPr sz="1200" b="0" i="0">
-                <a:solidFill>
-                  <a:srgbClr val="FFFFFF"/>
-                </a:solidFill>
-                <a:latin typeface="Alegreya Sans"/>
-              </a:rPr>
-              <a:t>Team refresh of the client master data; redesign of product and family codes in the ERP.</a:t>
-            </a:r>
-          </a:p>
-          <a:p>
-            <a:pPr algn="l" lvl="1">
-              <a:spcAft>
-                <a:spcPts val="100"/>
-              </a:spcAft>
-            </a:pPr>
-            <a:r>
-              <a:rPr sz="1200" b="1" i="0">
-                <a:solidFill>
-                  <a:srgbClr val="3AEDE5"/>
-                </a:solidFill>
-                <a:latin typeface="Alegreya Sans"/>
-              </a:rPr>
-              <a:t>•  </a:t>
-            </a:r>
-            <a:r>
-              <a:rPr sz="1200" b="0" i="0">
-                <a:solidFill>
-                  <a:srgbClr val="FFFFFF"/>
-                </a:solidFill>
-                <a:latin typeface="Alegreya Sans"/>
-              </a:rPr>
-              <a:t>Communication plans for product themes (CO2 module, online vault, IT-managed services).</a:t>
-            </a:r>
-          </a:p>
-          <a:p>
-            <a:pPr algn="l">
-              <a:spcAft>
-                <a:spcPts val="100"/>
-              </a:spcAft>
-            </a:pPr>
-            <a:r>
-              <a:rPr sz="1200" b="1" i="0">
-                <a:solidFill>
-                  <a:srgbClr val="3AEDE5"/>
-                </a:solidFill>
-                <a:latin typeface="Alegreya Sans"/>
-              </a:rPr>
-              <a:t>▸ </a:t>
-            </a:r>
-            <a:r>
-              <a:rPr sz="1200" b="1" i="0">
-                <a:solidFill>
-                  <a:srgbClr val="FFFFFF"/>
-                </a:solidFill>
-                <a:latin typeface="Alegreya Sans"/>
-              </a:rPr>
-              <a:t>Rêver d'Ailleurs</a:t>
-            </a:r>
-            <a:r>
-              <a:rPr sz="1200" b="0" i="0">
-                <a:solidFill>
-                  <a:srgbClr val="FFFFFF"/>
-                </a:solidFill>
-                <a:latin typeface="Alegreya Sans"/>
-              </a:rPr>
-              <a:t> — Communication intern — Events</a:t>
-            </a:r>
-            <a:r>
-              <a:rPr sz="1200" b="0" i="1">
-                <a:solidFill>
-                  <a:srgbClr val="3AEDE5"/>
-                </a:solidFill>
-                <a:latin typeface="Alegreya Sans"/>
-              </a:rPr>
-              <a:t>  (2024 — 4 months)</a:t>
-            </a:r>
-          </a:p>
-          <a:p>
-            <a:pPr algn="l" lvl="1">
-              <a:spcAft>
-                <a:spcPts val="100"/>
-              </a:spcAft>
-            </a:pPr>
-            <a:r>
-              <a:rPr sz="1200" b="1" i="0">
-                <a:solidFill>
-                  <a:srgbClr val="3AEDE5"/>
-                </a:solidFill>
-                <a:latin typeface="Alegreya Sans"/>
-              </a:rPr>
-              <a:t>•  </a:t>
-            </a:r>
-            <a:r>
-              <a:rPr sz="1200" b="0" i="0">
-                <a:solidFill>
-                  <a:srgbClr val="FFFFFF"/>
-                </a:solidFill>
-                <a:latin typeface="Alegreya Sans"/>
-              </a:rPr>
-              <a:t>Writing, planning, organising and hosting events; visual and content creation.</a:t>
-            </a:r>
-          </a:p>
-          <a:p>
-            <a:pPr algn="l">
-              <a:spcAft>
-                <a:spcPts val="100"/>
-              </a:spcAft>
-            </a:pPr>
-            <a:r>
-              <a:rPr sz="1200" b="1" i="0">
-                <a:solidFill>
-                  <a:srgbClr val="3AEDE5"/>
-                </a:solidFill>
-                <a:latin typeface="Alegreya Sans"/>
-              </a:rPr>
-              <a:t>▸ </a:t>
-            </a:r>
-            <a:r>
-              <a:rPr sz="1200" b="1" i="0">
-                <a:solidFill>
-                  <a:srgbClr val="FFFFFF"/>
-                </a:solidFill>
-                <a:latin typeface="Alegreya Sans"/>
-              </a:rPr>
-              <a:t>Athlon</a:t>
-            </a:r>
-            <a:r>
-              <a:rPr sz="1200" b="0" i="0">
-                <a:solidFill>
-                  <a:srgbClr val="FFFFFF"/>
-                </a:solidFill>
-                <a:latin typeface="Alegreya Sans"/>
-              </a:rPr>
-              <a:t> — Internal Communication intern</a:t>
-            </a:r>
-            <a:r>
-              <a:rPr sz="1200" b="0" i="1">
-                <a:solidFill>
-                  <a:srgbClr val="3AEDE5"/>
-                </a:solidFill>
-                <a:latin typeface="Alegreya Sans"/>
-              </a:rPr>
-              <a:t>  (2023 — 4 months)</a:t>
-            </a:r>
-          </a:p>
-          <a:p>
-            <a:pPr algn="l" lvl="1">
-              <a:spcAft>
-                <a:spcPts val="100"/>
-              </a:spcAft>
-            </a:pPr>
-            <a:r>
-              <a:rPr sz="1200" b="1" i="0">
-                <a:solidFill>
-                  <a:srgbClr val="3AEDE5"/>
-                </a:solidFill>
-                <a:latin typeface="Alegreya Sans"/>
-              </a:rPr>
-              <a:t>•  </a:t>
-            </a:r>
-            <a:r>
-              <a:rPr sz="1200" b="0" i="0">
-                <a:solidFill>
-                  <a:srgbClr val="FFFFFF"/>
-                </a:solidFill>
-                <a:latin typeface="Alegreya Sans"/>
-              </a:rPr>
-              <a:t>Drafted the company welcome booklet; created visuals and videos.</a:t>
-            </a:r>
-          </a:p>
-          <a:p>
-            <a:pPr algn="l" lvl="1">
-              <a:spcAft>
-                <a:spcPts val="100"/>
-              </a:spcAft>
-            </a:pPr>
-            <a:r>
-              <a:rPr sz="1200" b="1" i="0">
-                <a:solidFill>
-                  <a:srgbClr val="3AEDE5"/>
-                </a:solidFill>
-                <a:latin typeface="Alegreya Sans"/>
-              </a:rPr>
-              <a:t>•  </a:t>
-            </a:r>
-            <a:r>
-              <a:rPr sz="1200" b="0" i="0">
-                <a:solidFill>
-                  <a:srgbClr val="FFFFFF"/>
-                </a:solidFill>
-                <a:latin typeface="Alegreya Sans"/>
-              </a:rPr>
-              <a:t>Internal/external research on modern concepts; editorial logic across themes.</a:t>
-            </a:r>
           </a:p>
         </p:txBody>
       </p:sp>

--- a/outputs/C.C._marketing_communication.pptx
+++ b/outputs/C.C._marketing_communication.pptx
@@ -3830,7 +3830,7 @@
                 </a:solidFill>
                 <a:latin typeface="Alegreya Sans"/>
               </a:rPr>
-              <a:t>Curieuse, créative et dotée d'un esprit analytique, je prépare ma dernière année de Master en Communication &amp; Marketing. Mon objectif : rejoindre une équipe ambitieuse où je pourrai transformer les id…</a:t>
+              <a:t>Curieuse, créative et dotée d'un esprit analytique, je prépare ma dernière année de Master en Communication &amp; Marketing. Mon objectif : rejoindre une équipe ambitieuse où je pourrai transformer les idées en actions concrètes.</a:t>
             </a:r>
           </a:p>
           <a:p>
